--- a/La-Vallee-de-la-Vision-Etude-biblique.pptx
+++ b/La-Vallee-de-la-Vision-Etude-biblique.pptx
@@ -126,7 +126,7 @@
 <file path=ppt/revisionInfo.xml><?xml version="1.0" encoding="utf-8"?>
 <p1510:revInfo xmlns:a="http://schemas.openxmlformats.org/drawingml/2006/main" xmlns:r="http://schemas.openxmlformats.org/officeDocument/2006/relationships" xmlns:p1510="http://schemas.microsoft.com/office/powerpoint/2015/10/main">
   <p1510:revLst>
-    <p1510:client id="{806F9150-0F49-40D7-BCCA-1C0152742B58}" v="1" dt="2026-06-25T11:13:25.264"/>
+    <p1510:client id="{806F9150-0F49-40D7-BCCA-1C0152742B58}" v="5" dt="2026-06-25T12:48:36.335"/>
   </p1510:revLst>
 </p1510:revInfo>
 </file>
@@ -136,7 +136,7 @@
   <pc:docChgLst>
     <pc:chgData name="André-Guy Bruneau" userId="c9f3b82d5570fc32" providerId="LiveId" clId="{C4496A7D-9A64-4B82-9835-F710A7718518}"/>
     <pc:docChg chg="undo custSel addSld delSld modSld">
-      <pc:chgData name="André-Guy Bruneau" userId="c9f3b82d5570fc32" providerId="LiveId" clId="{C4496A7D-9A64-4B82-9835-F710A7718518}" dt="2026-06-25T12:35:40.173" v="528" actId="1076"/>
+      <pc:chgData name="André-Guy Bruneau" userId="c9f3b82d5570fc32" providerId="LiveId" clId="{C4496A7D-9A64-4B82-9835-F710A7718518}" dt="2026-06-25T12:51:39.399" v="710" actId="20577"/>
       <pc:docMkLst>
         <pc:docMk/>
       </pc:docMkLst>
@@ -506,7 +506,7 @@
         </pc:spChg>
       </pc:sldChg>
       <pc:sldChg chg="modSp add mod">
-        <pc:chgData name="André-Guy Bruneau" userId="c9f3b82d5570fc32" providerId="LiveId" clId="{C4496A7D-9A64-4B82-9835-F710A7718518}" dt="2026-06-25T12:35:40.173" v="528" actId="1076"/>
+        <pc:chgData name="André-Guy Bruneau" userId="c9f3b82d5570fc32" providerId="LiveId" clId="{C4496A7D-9A64-4B82-9835-F710A7718518}" dt="2026-06-25T12:41:41.091" v="608" actId="6549"/>
         <pc:sldMkLst>
           <pc:docMk/>
           <pc:sldMk cId="2732842191" sldId="291"/>
@@ -519,20 +519,84 @@
             <ac:spMk id="3" creationId="{00000000-0000-0000-0000-000000000000}"/>
           </ac:spMkLst>
         </pc:spChg>
+        <pc:spChg chg="mod">
+          <ac:chgData name="André-Guy Bruneau" userId="c9f3b82d5570fc32" providerId="LiveId" clId="{C4496A7D-9A64-4B82-9835-F710A7718518}" dt="2026-06-25T12:38:00.258" v="570" actId="6549"/>
+          <ac:spMkLst>
+            <pc:docMk/>
+            <pc:sldMk cId="2732842191" sldId="291"/>
+            <ac:spMk id="4" creationId="{00000000-0000-0000-0000-000000000000}"/>
+          </ac:spMkLst>
+        </pc:spChg>
+        <pc:spChg chg="mod">
+          <ac:chgData name="André-Guy Bruneau" userId="c9f3b82d5570fc32" providerId="LiveId" clId="{C4496A7D-9A64-4B82-9835-F710A7718518}" dt="2026-06-25T12:41:30.593" v="599" actId="6549"/>
+          <ac:spMkLst>
+            <pc:docMk/>
+            <pc:sldMk cId="2732842191" sldId="291"/>
+            <ac:spMk id="6" creationId="{00000000-0000-0000-0000-000000000000}"/>
+          </ac:spMkLst>
+        </pc:spChg>
+        <pc:spChg chg="mod">
+          <ac:chgData name="André-Guy Bruneau" userId="c9f3b82d5570fc32" providerId="LiveId" clId="{C4496A7D-9A64-4B82-9835-F710A7718518}" dt="2026-06-25T12:41:41.091" v="608" actId="6549"/>
+          <ac:spMkLst>
+            <pc:docMk/>
+            <pc:sldMk cId="2732842191" sldId="291"/>
+            <ac:spMk id="8" creationId="{00000000-0000-0000-0000-000000000000}"/>
+          </ac:spMkLst>
+        </pc:spChg>
       </pc:sldChg>
-      <pc:sldChg chg="add">
-        <pc:chgData name="André-Guy Bruneau" userId="c9f3b82d5570fc32" providerId="LiveId" clId="{C4496A7D-9A64-4B82-9835-F710A7718518}" dt="2026-06-25T12:09:36.823" v="122"/>
+      <pc:sldChg chg="modSp add mod">
+        <pc:chgData name="André-Guy Bruneau" userId="c9f3b82d5570fc32" providerId="LiveId" clId="{C4496A7D-9A64-4B82-9835-F710A7718518}" dt="2026-06-25T12:51:27.549" v="709" actId="20577"/>
         <pc:sldMkLst>
           <pc:docMk/>
           <pc:sldMk cId="3373682352" sldId="292"/>
         </pc:sldMkLst>
+        <pc:spChg chg="mod">
+          <ac:chgData name="André-Guy Bruneau" userId="c9f3b82d5570fc32" providerId="LiveId" clId="{C4496A7D-9A64-4B82-9835-F710A7718518}" dt="2026-06-25T12:42:22.663" v="620" actId="20577"/>
+          <ac:spMkLst>
+            <pc:docMk/>
+            <pc:sldMk cId="3373682352" sldId="292"/>
+            <ac:spMk id="4" creationId="{00000000-0000-0000-0000-000000000000}"/>
+          </ac:spMkLst>
+        </pc:spChg>
+        <pc:spChg chg="mod">
+          <ac:chgData name="André-Guy Bruneau" userId="c9f3b82d5570fc32" providerId="LiveId" clId="{C4496A7D-9A64-4B82-9835-F710A7718518}" dt="2026-06-25T12:47:50.508" v="655" actId="20577"/>
+          <ac:spMkLst>
+            <pc:docMk/>
+            <pc:sldMk cId="3373682352" sldId="292"/>
+            <ac:spMk id="6" creationId="{00000000-0000-0000-0000-000000000000}"/>
+          </ac:spMkLst>
+        </pc:spChg>
+        <pc:spChg chg="mod">
+          <ac:chgData name="André-Guy Bruneau" userId="c9f3b82d5570fc32" providerId="LiveId" clId="{C4496A7D-9A64-4B82-9835-F710A7718518}" dt="2026-06-25T12:51:27.549" v="709" actId="20577"/>
+          <ac:spMkLst>
+            <pc:docMk/>
+            <pc:sldMk cId="3373682352" sldId="292"/>
+            <ac:spMk id="9" creationId="{00000000-0000-0000-0000-000000000000}"/>
+          </ac:spMkLst>
+        </pc:spChg>
       </pc:sldChg>
-      <pc:sldChg chg="add">
-        <pc:chgData name="André-Guy Bruneau" userId="c9f3b82d5570fc32" providerId="LiveId" clId="{C4496A7D-9A64-4B82-9835-F710A7718518}" dt="2026-06-25T12:09:40.139" v="124"/>
+      <pc:sldChg chg="modSp add mod">
+        <pc:chgData name="André-Guy Bruneau" userId="c9f3b82d5570fc32" providerId="LiveId" clId="{C4496A7D-9A64-4B82-9835-F710A7718518}" dt="2026-06-25T12:51:39.399" v="710" actId="20577"/>
         <pc:sldMkLst>
           <pc:docMk/>
           <pc:sldMk cId="70202141" sldId="293"/>
         </pc:sldMkLst>
+        <pc:spChg chg="mod">
+          <ac:chgData name="André-Guy Bruneau" userId="c9f3b82d5570fc32" providerId="LiveId" clId="{C4496A7D-9A64-4B82-9835-F710A7718518}" dt="2026-06-25T12:50:07.952" v="699" actId="20577"/>
+          <ac:spMkLst>
+            <pc:docMk/>
+            <pc:sldMk cId="70202141" sldId="293"/>
+            <ac:spMk id="6" creationId="{00000000-0000-0000-0000-000000000000}"/>
+          </ac:spMkLst>
+        </pc:spChg>
+        <pc:spChg chg="mod">
+          <ac:chgData name="André-Guy Bruneau" userId="c9f3b82d5570fc32" providerId="LiveId" clId="{C4496A7D-9A64-4B82-9835-F710A7718518}" dt="2026-06-25T12:51:39.399" v="710" actId="20577"/>
+          <ac:spMkLst>
+            <pc:docMk/>
+            <pc:sldMk cId="70202141" sldId="293"/>
+            <ac:spMk id="9" creationId="{00000000-0000-0000-0000-000000000000}"/>
+          </ac:spMkLst>
+        </pc:spChg>
       </pc:sldChg>
       <pc:sldChg chg="add">
         <pc:chgData name="André-Guy Bruneau" userId="c9f3b82d5570fc32" providerId="LiveId" clId="{C4496A7D-9A64-4B82-9835-F710A7718518}" dt="2026-06-25T12:09:42.256" v="132"/>
@@ -6845,7 +6909,7 @@
                 <a:ea typeface="Cambria" pitchFamily="34" charset="-122"/>
                 <a:cs typeface="Cambria" pitchFamily="34" charset="-120"/>
               </a:rPr>
-              <a:t>« Seigneur, élevé et saint, doux et humble »</a:t>
+              <a:t>Matthieu 11.29 – « Seigneur, élevé et saint, doux et humble »</a:t>
             </a:r>
             <a:endParaRPr lang="en-US" sz="2800" dirty="0"/>
           </a:p>
@@ -6928,7 +6992,75 @@
                 <a:ea typeface="Cambria" pitchFamily="34" charset="-122"/>
                 <a:cs typeface="Cambria" pitchFamily="34" charset="-120"/>
               </a:rPr>
-              <a:t>L'invocation pose d'emblée le paradoxe central : le Dieu transcendant est aussi le Dieu qui s'abaisse. Écho direct d'Ésaïe 57.15 — </a:t>
+              <a:t>L'invocation pose d'emblée le paradoxe central : le Dieu transcendant est aussi le Dieu qui s'abaisse. </a:t>
+            </a:r>
+          </a:p>
+          <a:p>
+            <a:pPr marL="0" indent="0" algn="ctr">
+              <a:lnSpc>
+                <a:spcPts val="2300"/>
+              </a:lnSpc>
+              <a:buNone/>
+            </a:pPr>
+            <a:endParaRPr lang="en-US" sz="1550" dirty="0">
+              <a:solidFill>
+                <a:srgbClr val="F5EFE4"/>
+              </a:solidFill>
+              <a:latin typeface="Cambria" pitchFamily="34" charset="0"/>
+              <a:ea typeface="Cambria" pitchFamily="34" charset="-122"/>
+              <a:cs typeface="Cambria" pitchFamily="34" charset="-120"/>
+            </a:endParaRPr>
+          </a:p>
+          <a:p>
+            <a:pPr marL="0" indent="0" algn="ctr">
+              <a:lnSpc>
+                <a:spcPts val="2300"/>
+              </a:lnSpc>
+              <a:buNone/>
+            </a:pPr>
+            <a:r>
+              <a:rPr lang="en-US" sz="1550" dirty="0" err="1">
+                <a:solidFill>
+                  <a:srgbClr val="F5EFE4"/>
+                </a:solidFill>
+                <a:latin typeface="Cambria" pitchFamily="34" charset="0"/>
+                <a:ea typeface="Cambria" pitchFamily="34" charset="-122"/>
+                <a:cs typeface="Cambria" pitchFamily="34" charset="-120"/>
+              </a:rPr>
+              <a:t>Écho</a:t>
+            </a:r>
+            <a:r>
+              <a:rPr lang="en-US" sz="1550" dirty="0">
+                <a:solidFill>
+                  <a:srgbClr val="F5EFE4"/>
+                </a:solidFill>
+                <a:latin typeface="Cambria" pitchFamily="34" charset="0"/>
+                <a:ea typeface="Cambria" pitchFamily="34" charset="-122"/>
+                <a:cs typeface="Cambria" pitchFamily="34" charset="-120"/>
+              </a:rPr>
+              <a:t> direct </a:t>
+            </a:r>
+            <a:r>
+              <a:rPr lang="en-US" sz="1550" dirty="0" err="1">
+                <a:solidFill>
+                  <a:srgbClr val="F5EFE4"/>
+                </a:solidFill>
+                <a:latin typeface="Cambria" pitchFamily="34" charset="0"/>
+                <a:ea typeface="Cambria" pitchFamily="34" charset="-122"/>
+                <a:cs typeface="Cambria" pitchFamily="34" charset="-120"/>
+              </a:rPr>
+              <a:t>d'Ésaïe</a:t>
+            </a:r>
+            <a:r>
+              <a:rPr lang="en-US" sz="1550" dirty="0">
+                <a:solidFill>
+                  <a:srgbClr val="F5EFE4"/>
+                </a:solidFill>
+                <a:latin typeface="Cambria" pitchFamily="34" charset="0"/>
+                <a:ea typeface="Cambria" pitchFamily="34" charset="-122"/>
+                <a:cs typeface="Cambria" pitchFamily="34" charset="-120"/>
+              </a:rPr>
+              <a:t> 57.15b — </a:t>
             </a:r>
             <a:r>
               <a:rPr lang="en-US" sz="1550" i="1" dirty="0">
@@ -6950,7 +7082,108 @@
                 <a:ea typeface="Cambria" pitchFamily="34" charset="-122"/>
                 <a:cs typeface="Cambria" pitchFamily="34" charset="-120"/>
               </a:rPr>
-              <a:t>  Cette tension gouverne toute la prière, qui se déploie ensuite en quatre mouvements.</a:t>
+              <a:t> </a:t>
+            </a:r>
+          </a:p>
+          <a:p>
+            <a:pPr marL="0" indent="0" algn="ctr">
+              <a:lnSpc>
+                <a:spcPts val="2300"/>
+              </a:lnSpc>
+              <a:buNone/>
+            </a:pPr>
+            <a:endParaRPr lang="en-US" sz="1550" dirty="0">
+              <a:solidFill>
+                <a:srgbClr val="F5EFE4"/>
+              </a:solidFill>
+              <a:latin typeface="Cambria" pitchFamily="34" charset="0"/>
+              <a:ea typeface="Cambria" pitchFamily="34" charset="-122"/>
+              <a:cs typeface="Cambria" pitchFamily="34" charset="-120"/>
+            </a:endParaRPr>
+          </a:p>
+          <a:p>
+            <a:pPr marL="0" indent="0" algn="ctr">
+              <a:lnSpc>
+                <a:spcPts val="2300"/>
+              </a:lnSpc>
+              <a:buNone/>
+            </a:pPr>
+            <a:r>
+              <a:rPr lang="en-US" sz="1550" dirty="0">
+                <a:solidFill>
+                  <a:srgbClr val="F5EFE4"/>
+                </a:solidFill>
+                <a:latin typeface="Cambria" pitchFamily="34" charset="0"/>
+                <a:ea typeface="Cambria" pitchFamily="34" charset="-122"/>
+                <a:cs typeface="Cambria" pitchFamily="34" charset="-120"/>
+              </a:rPr>
+              <a:t>Cette tension </a:t>
+            </a:r>
+            <a:r>
+              <a:rPr lang="en-US" sz="1550" dirty="0" err="1">
+                <a:solidFill>
+                  <a:srgbClr val="F5EFE4"/>
+                </a:solidFill>
+                <a:latin typeface="Cambria" pitchFamily="34" charset="0"/>
+                <a:ea typeface="Cambria" pitchFamily="34" charset="-122"/>
+                <a:cs typeface="Cambria" pitchFamily="34" charset="-120"/>
+              </a:rPr>
+              <a:t>gouverne</a:t>
+            </a:r>
+            <a:r>
+              <a:rPr lang="en-US" sz="1550" dirty="0">
+                <a:solidFill>
+                  <a:srgbClr val="F5EFE4"/>
+                </a:solidFill>
+                <a:latin typeface="Cambria" pitchFamily="34" charset="0"/>
+                <a:ea typeface="Cambria" pitchFamily="34" charset="-122"/>
+                <a:cs typeface="Cambria" pitchFamily="34" charset="-120"/>
+              </a:rPr>
+              <a:t> la prière, qui se </a:t>
+            </a:r>
+            <a:r>
+              <a:rPr lang="en-US" sz="1550" dirty="0" err="1">
+                <a:solidFill>
+                  <a:srgbClr val="F5EFE4"/>
+                </a:solidFill>
+                <a:latin typeface="Cambria" pitchFamily="34" charset="0"/>
+                <a:ea typeface="Cambria" pitchFamily="34" charset="-122"/>
+                <a:cs typeface="Cambria" pitchFamily="34" charset="-120"/>
+              </a:rPr>
+              <a:t>déploie</a:t>
+            </a:r>
+            <a:r>
+              <a:rPr lang="en-US" sz="1550" dirty="0">
+                <a:solidFill>
+                  <a:srgbClr val="F5EFE4"/>
+                </a:solidFill>
+                <a:latin typeface="Cambria" pitchFamily="34" charset="0"/>
+                <a:ea typeface="Cambria" pitchFamily="34" charset="-122"/>
+                <a:cs typeface="Cambria" pitchFamily="34" charset="-120"/>
+              </a:rPr>
+              <a:t> </a:t>
+            </a:r>
+            <a:r>
+              <a:rPr lang="en-US" sz="1550" dirty="0" err="1">
+                <a:solidFill>
+                  <a:srgbClr val="F5EFE4"/>
+                </a:solidFill>
+                <a:latin typeface="Cambria" pitchFamily="34" charset="0"/>
+                <a:ea typeface="Cambria" pitchFamily="34" charset="-122"/>
+                <a:cs typeface="Cambria" pitchFamily="34" charset="-120"/>
+              </a:rPr>
+              <a:t>en</a:t>
+            </a:r>
+            <a:r>
+              <a:rPr lang="en-US" sz="1550" dirty="0">
+                <a:solidFill>
+                  <a:srgbClr val="F5EFE4"/>
+                </a:solidFill>
+                <a:latin typeface="Cambria" pitchFamily="34" charset="0"/>
+                <a:ea typeface="Cambria" pitchFamily="34" charset="-122"/>
+                <a:cs typeface="Cambria" pitchFamily="34" charset="-120"/>
+              </a:rPr>
+              <a:t> 4 mouvements.</a:t>
             </a:r>
             <a:endParaRPr lang="en-US" sz="1550" dirty="0"/>
           </a:p>
@@ -7030,7 +7263,18 @@
                 <a:ea typeface="Cambria" pitchFamily="34" charset="-122"/>
                 <a:cs typeface="Cambria" pitchFamily="34" charset="-120"/>
               </a:rPr>
-              <a:t>Quatre mouvements</a:t>
+              <a:t>4 </a:t>
+            </a:r>
+            <a:r>
+              <a:rPr lang="en-US" sz="1600" b="1" dirty="0" err="1">
+                <a:solidFill>
+                  <a:srgbClr val="E8821E"/>
+                </a:solidFill>
+                <a:latin typeface="Cambria" pitchFamily="34" charset="0"/>
+                <a:ea typeface="Cambria" pitchFamily="34" charset="-122"/>
+                <a:cs typeface="Cambria" pitchFamily="34" charset="-120"/>
+              </a:rPr>
+              <a:t>Mouvements</a:t>
             </a:r>
             <a:endParaRPr lang="en-US" sz="1600" dirty="0"/>
           </a:p>
@@ -7358,7 +7602,29 @@
                 <a:ea typeface="Cambria" pitchFamily="34" charset="-122"/>
                 <a:cs typeface="Cambria" pitchFamily="34" charset="-120"/>
               </a:rPr>
-              <a:t>1.  « Tu m'as conduit dans la vallée »</a:t>
+              <a:t>1.  « Tu m'as conduit dans la </a:t>
+            </a:r>
+            <a:r>
+              <a:rPr lang="en-US" sz="2700" b="1" dirty="0" err="1">
+                <a:solidFill>
+                  <a:srgbClr val="F5EFE4"/>
+                </a:solidFill>
+                <a:latin typeface="Cambria" pitchFamily="34" charset="0"/>
+                <a:ea typeface="Cambria" pitchFamily="34" charset="-122"/>
+                <a:cs typeface="Cambria" pitchFamily="34" charset="-120"/>
+              </a:rPr>
+              <a:t>vallée</a:t>
+            </a:r>
+            <a:r>
+              <a:rPr lang="en-US" sz="2700" b="1" dirty="0">
+                <a:solidFill>
+                  <a:srgbClr val="F5EFE4"/>
+                </a:solidFill>
+                <a:latin typeface="Cambria" pitchFamily="34" charset="0"/>
+                <a:ea typeface="Cambria" pitchFamily="34" charset="-122"/>
+                <a:cs typeface="Cambria" pitchFamily="34" charset="-120"/>
+              </a:rPr>
+              <a:t> de la vision»</a:t>
             </a:r>
             <a:endParaRPr lang="en-US" sz="2700" dirty="0"/>
           </a:p>
@@ -7426,119 +7692,126 @@
           <a:bodyPr wrap="square" rtlCol="0" anchor="t"/>
           <a:lstStyle/>
           <a:p>
-            <a:pPr marL="0" indent="0" algn="l">
+            <a:pPr>
               <a:lnSpc>
                 <a:spcPts val="2278"/>
               </a:lnSpc>
               <a:spcAft>
                 <a:spcPts val="500"/>
               </a:spcAft>
-              <a:buNone/>
-            </a:pPr>
-            <a:r>
-              <a:rPr lang="en-US" sz="1700" i="1" dirty="0">
-                <a:solidFill>
-                  <a:srgbClr val="F5EFE4"/>
-                </a:solidFill>
-                <a:latin typeface="Cambria" pitchFamily="34" charset="0"/>
-                <a:ea typeface="Cambria" pitchFamily="34" charset="-122"/>
-                <a:cs typeface="Cambria" pitchFamily="34" charset="-120"/>
-              </a:rPr>
-              <a:t>Tu m'as conduit dans la vallée de la vision,</a:t>
-            </a:r>
-            <a:endParaRPr lang="en-US" sz="1700" dirty="0"/>
-          </a:p>
-          <a:p>
-            <a:pPr marL="0" indent="0" algn="l">
+            </a:pPr>
+            <a:endParaRPr lang="fr-FR" sz="2000" i="1" dirty="0">
+              <a:solidFill>
+                <a:srgbClr val="F5EFE4"/>
+              </a:solidFill>
+              <a:latin typeface="Cambria" pitchFamily="34" charset="0"/>
+              <a:ea typeface="Cambria" pitchFamily="34" charset="-122"/>
+              <a:cs typeface="Cambria" pitchFamily="34" charset="-120"/>
+            </a:endParaRPr>
+          </a:p>
+          <a:p>
+            <a:pPr>
               <a:lnSpc>
                 <a:spcPts val="2278"/>
               </a:lnSpc>
               <a:spcAft>
                 <a:spcPts val="500"/>
               </a:spcAft>
-              <a:buNone/>
-            </a:pPr>
-            <a:r>
-              <a:rPr lang="en-US" sz="1700" i="1" dirty="0">
-                <a:solidFill>
-                  <a:srgbClr val="F5EFE4"/>
-                </a:solidFill>
-                <a:latin typeface="Cambria" pitchFamily="34" charset="0"/>
-                <a:ea typeface="Cambria" pitchFamily="34" charset="-122"/>
-                <a:cs typeface="Cambria" pitchFamily="34" charset="-120"/>
-              </a:rPr>
-              <a:t>où je réside dans les profondeurs,</a:t>
-            </a:r>
-            <a:endParaRPr lang="en-US" sz="1700" dirty="0"/>
-          </a:p>
-          <a:p>
-            <a:pPr marL="0" indent="0" algn="l">
+            </a:pPr>
+            <a:endParaRPr lang="fr-FR" sz="2000" i="1" dirty="0">
+              <a:solidFill>
+                <a:srgbClr val="F5EFE4"/>
+              </a:solidFill>
+              <a:latin typeface="Cambria" pitchFamily="34" charset="0"/>
+              <a:ea typeface="Cambria" pitchFamily="34" charset="-122"/>
+              <a:cs typeface="Cambria" pitchFamily="34" charset="-120"/>
+            </a:endParaRPr>
+          </a:p>
+          <a:p>
+            <a:pPr>
               <a:lnSpc>
                 <a:spcPts val="2278"/>
               </a:lnSpc>
               <a:spcAft>
                 <a:spcPts val="500"/>
               </a:spcAft>
-              <a:buNone/>
-            </a:pPr>
-            <a:r>
-              <a:rPr lang="en-US" sz="1700" i="1" dirty="0">
-                <a:solidFill>
-                  <a:srgbClr val="F5EFE4"/>
-                </a:solidFill>
-                <a:latin typeface="Cambria" pitchFamily="34" charset="0"/>
-                <a:ea typeface="Cambria" pitchFamily="34" charset="-122"/>
-                <a:cs typeface="Cambria" pitchFamily="34" charset="-120"/>
-              </a:rPr>
-              <a:t>mais je te vois sur les hauteurs ;</a:t>
-            </a:r>
-            <a:endParaRPr lang="en-US" sz="1700" dirty="0"/>
-          </a:p>
-          <a:p>
-            <a:pPr marL="0" indent="0" algn="l">
+            </a:pPr>
+            <a:endParaRPr lang="fr-FR" sz="2000" i="1" dirty="0">
+              <a:solidFill>
+                <a:srgbClr val="F5EFE4"/>
+              </a:solidFill>
+              <a:latin typeface="Cambria" pitchFamily="34" charset="0"/>
+              <a:ea typeface="Cambria" pitchFamily="34" charset="-122"/>
+              <a:cs typeface="Cambria" pitchFamily="34" charset="-120"/>
+            </a:endParaRPr>
+          </a:p>
+          <a:p>
+            <a:pPr>
               <a:lnSpc>
                 <a:spcPts val="2278"/>
               </a:lnSpc>
               <a:spcAft>
                 <a:spcPts val="500"/>
               </a:spcAft>
-              <a:buNone/>
-            </a:pPr>
-            <a:r>
-              <a:rPr lang="en-US" sz="1700" i="1" dirty="0">
-                <a:solidFill>
-                  <a:srgbClr val="F5EFE4"/>
-                </a:solidFill>
-                <a:latin typeface="Cambria" pitchFamily="34" charset="0"/>
-                <a:ea typeface="Cambria" pitchFamily="34" charset="-122"/>
-                <a:cs typeface="Cambria" pitchFamily="34" charset="-120"/>
-              </a:rPr>
-              <a:t>encerclé par les montagnes du péché,</a:t>
-            </a:r>
-            <a:endParaRPr lang="en-US" sz="1700" dirty="0"/>
-          </a:p>
-          <a:p>
-            <a:pPr marL="0" indent="0" algn="l">
+            </a:pPr>
+            <a:r>
+              <a:rPr lang="fr-FR" sz="2000" i="1" dirty="0">
+                <a:solidFill>
+                  <a:srgbClr val="F5EFE4"/>
+                </a:solidFill>
+                <a:latin typeface="Cambria" pitchFamily="34" charset="0"/>
+                <a:ea typeface="Cambria" pitchFamily="34" charset="-122"/>
+                <a:cs typeface="Cambria" pitchFamily="34" charset="-120"/>
+              </a:rPr>
+              <a:t>où je réside dans les profondeurs, mais je te vois sur les hauteurs ; </a:t>
+            </a:r>
+          </a:p>
+          <a:p>
+            <a:pPr>
               <a:lnSpc>
                 <a:spcPts val="2278"/>
               </a:lnSpc>
               <a:spcAft>
                 <a:spcPts val="500"/>
               </a:spcAft>
-              <a:buNone/>
-            </a:pPr>
-            <a:r>
-              <a:rPr lang="en-US" sz="1700" i="1" dirty="0">
-                <a:solidFill>
-                  <a:srgbClr val="F5EFE4"/>
-                </a:solidFill>
-                <a:latin typeface="Cambria" pitchFamily="34" charset="0"/>
-                <a:ea typeface="Cambria" pitchFamily="34" charset="-122"/>
-                <a:cs typeface="Cambria" pitchFamily="34" charset="-120"/>
-              </a:rPr>
-              <a:t>je contemple ta gloire.</a:t>
-            </a:r>
-            <a:endParaRPr lang="en-US" sz="1700" dirty="0"/>
+            </a:pPr>
+            <a:endParaRPr lang="fr-FR" sz="2000" i="1" dirty="0">
+              <a:solidFill>
+                <a:srgbClr val="F5EFE4"/>
+              </a:solidFill>
+              <a:latin typeface="Cambria" pitchFamily="34" charset="0"/>
+              <a:ea typeface="Cambria" pitchFamily="34" charset="-122"/>
+              <a:cs typeface="Cambria" pitchFamily="34" charset="-120"/>
+            </a:endParaRPr>
+          </a:p>
+          <a:p>
+            <a:pPr>
+              <a:lnSpc>
+                <a:spcPts val="2278"/>
+              </a:lnSpc>
+              <a:spcAft>
+                <a:spcPts val="500"/>
+              </a:spcAft>
+            </a:pPr>
+            <a:r>
+              <a:rPr lang="fr-FR" sz="2000" i="1" dirty="0">
+                <a:solidFill>
+                  <a:srgbClr val="F5EFE4"/>
+                </a:solidFill>
+                <a:latin typeface="Cambria" pitchFamily="34" charset="0"/>
+                <a:ea typeface="Cambria" pitchFamily="34" charset="-122"/>
+                <a:cs typeface="Cambria" pitchFamily="34" charset="-120"/>
+              </a:rPr>
+              <a:t>encerclé par les montagnes du péché, je contemple ta gloire.</a:t>
+            </a:r>
+            <a:endParaRPr lang="en-US" sz="2000" i="1" dirty="0">
+              <a:solidFill>
+                <a:srgbClr val="F5EFE4"/>
+              </a:solidFill>
+              <a:latin typeface="Cambria" pitchFamily="34" charset="0"/>
+              <a:ea typeface="Cambria" pitchFamily="34" charset="-122"/>
+              <a:cs typeface="Cambria" pitchFamily="34" charset="-120"/>
+            </a:endParaRPr>
           </a:p>
         </p:txBody>
       </p:sp>
@@ -7649,29 +7922,14 @@
               </a:lnSpc>
               <a:buNone/>
             </a:pPr>
-            <a:r>
-              <a:rPr lang="en-US" sz="1400" b="1" dirty="0">
-                <a:solidFill>
-                  <a:srgbClr val="E8821E"/>
-                </a:solidFill>
-                <a:latin typeface="Cambria" pitchFamily="34" charset="0"/>
-                <a:ea typeface="Cambria" pitchFamily="34" charset="-122"/>
-                <a:cs typeface="Cambria" pitchFamily="34" charset="-120"/>
-              </a:rPr>
-              <a:t>Sens — </a:t>
-            </a:r>
-            <a:r>
-              <a:rPr lang="en-US" sz="1400" dirty="0">
-                <a:solidFill>
-                  <a:srgbClr val="F5EFE4"/>
-                </a:solidFill>
-                <a:latin typeface="Cambria" pitchFamily="34" charset="0"/>
-                <a:ea typeface="Cambria" pitchFamily="34" charset="-122"/>
-                <a:cs typeface="Cambria" pitchFamily="34" charset="-120"/>
-              </a:rPr>
-              <a:t>c'est Dieu lui-même qui « conduit » dans la vallée. L'affliction n'est pas un accident, mais une providence souveraine ordonnée pour le bien (Rm 8.28).</a:t>
-            </a:r>
-            <a:endParaRPr lang="en-US" sz="1400" dirty="0"/>
+            <a:endParaRPr lang="en-US" sz="1400" b="1" dirty="0">
+              <a:solidFill>
+                <a:srgbClr val="E8821E"/>
+              </a:solidFill>
+              <a:latin typeface="Cambria" pitchFamily="34" charset="0"/>
+              <a:ea typeface="Cambria" pitchFamily="34" charset="-122"/>
+              <a:cs typeface="Cambria" pitchFamily="34" charset="-120"/>
+            </a:endParaRPr>
           </a:p>
           <a:p>
             <a:pPr marL="0" indent="0" algn="ctr">
@@ -7689,7 +7947,7 @@
                 <a:ea typeface="Cambria" pitchFamily="34" charset="-122"/>
                 <a:cs typeface="Cambria" pitchFamily="34" charset="-120"/>
               </a:rPr>
-              <a:t>Paradoxe — </a:t>
+              <a:t>Sens — </a:t>
             </a:r>
             <a:r>
               <a:rPr lang="en-US" sz="1400" dirty="0">
@@ -7700,9 +7958,102 @@
                 <a:ea typeface="Cambria" pitchFamily="34" charset="-122"/>
                 <a:cs typeface="Cambria" pitchFamily="34" charset="-120"/>
               </a:rPr>
-              <a:t>c'est du fond, dans la conscience du péché, que la gloire de Dieu se voit le plus clairement (És 57.15).</a:t>
+              <a:t>c'est Dieu lui-même qui « conduit » dans la vallée. L'affliction n'est pas un accident, mais une providence souveraine ordonnée pour le bien. </a:t>
+            </a:r>
+          </a:p>
+          <a:p>
+            <a:pPr marL="0" indent="0" algn="ctr">
+              <a:lnSpc>
+                <a:spcPts val="1848"/>
+              </a:lnSpc>
+              <a:buNone/>
+            </a:pPr>
+            <a:r>
+              <a:rPr lang="en-US" sz="1400" dirty="0">
+                <a:solidFill>
+                  <a:srgbClr val="F5EFE4"/>
+                </a:solidFill>
+                <a:latin typeface="Cambria" pitchFamily="34" charset="0"/>
+                <a:ea typeface="Cambria" pitchFamily="34" charset="-122"/>
+                <a:cs typeface="Cambria" pitchFamily="34" charset="-120"/>
+              </a:rPr>
+              <a:t>(Rm 8.28-29)</a:t>
             </a:r>
             <a:endParaRPr lang="en-US" sz="1400" dirty="0"/>
+          </a:p>
+          <a:p>
+            <a:pPr marL="0" indent="0" algn="ctr">
+              <a:lnSpc>
+                <a:spcPts val="1848"/>
+              </a:lnSpc>
+              <a:buNone/>
+            </a:pPr>
+            <a:endParaRPr lang="en-US" sz="1400" b="1" dirty="0">
+              <a:solidFill>
+                <a:srgbClr val="E8821E"/>
+              </a:solidFill>
+              <a:latin typeface="Cambria" pitchFamily="34" charset="0"/>
+              <a:ea typeface="Cambria" pitchFamily="34" charset="-122"/>
+              <a:cs typeface="Cambria" pitchFamily="34" charset="-120"/>
+            </a:endParaRPr>
+          </a:p>
+          <a:p>
+            <a:pPr marL="0" indent="0" algn="ctr">
+              <a:lnSpc>
+                <a:spcPts val="1848"/>
+              </a:lnSpc>
+              <a:buNone/>
+            </a:pPr>
+            <a:r>
+              <a:rPr lang="en-US" sz="1400" b="1" dirty="0" err="1">
+                <a:solidFill>
+                  <a:srgbClr val="E8821E"/>
+                </a:solidFill>
+                <a:latin typeface="Cambria" pitchFamily="34" charset="0"/>
+                <a:ea typeface="Cambria" pitchFamily="34" charset="-122"/>
+                <a:cs typeface="Cambria" pitchFamily="34" charset="-120"/>
+              </a:rPr>
+              <a:t>Paradoxe</a:t>
+            </a:r>
+            <a:r>
+              <a:rPr lang="en-US" sz="1400" b="1" dirty="0">
+                <a:solidFill>
+                  <a:srgbClr val="E8821E"/>
+                </a:solidFill>
+                <a:latin typeface="Cambria" pitchFamily="34" charset="0"/>
+                <a:ea typeface="Cambria" pitchFamily="34" charset="-122"/>
+                <a:cs typeface="Cambria" pitchFamily="34" charset="-120"/>
+              </a:rPr>
+              <a:t> — </a:t>
+            </a:r>
+            <a:r>
+              <a:rPr lang="en-US" sz="1400" dirty="0">
+                <a:solidFill>
+                  <a:srgbClr val="F5EFE4"/>
+                </a:solidFill>
+                <a:latin typeface="Cambria" pitchFamily="34" charset="0"/>
+                <a:ea typeface="Cambria" pitchFamily="34" charset="-122"/>
+                <a:cs typeface="Cambria" pitchFamily="34" charset="-120"/>
+              </a:rPr>
+              <a:t>c'est du fond, dans la conscience du péché, que la gloire de Dieu se voit le plus clairement (És 57.15)</a:t>
+            </a:r>
+            <a:endParaRPr lang="en-US" sz="1400" dirty="0"/>
+          </a:p>
+          <a:p>
+            <a:pPr marL="0" indent="0" algn="ctr">
+              <a:lnSpc>
+                <a:spcPts val="1848"/>
+              </a:lnSpc>
+              <a:buNone/>
+            </a:pPr>
+            <a:endParaRPr lang="en-US" sz="1400" b="1" dirty="0">
+              <a:solidFill>
+                <a:srgbClr val="E8821E"/>
+              </a:solidFill>
+              <a:latin typeface="Cambria" pitchFamily="34" charset="0"/>
+              <a:ea typeface="Cambria" pitchFamily="34" charset="-122"/>
+              <a:cs typeface="Cambria" pitchFamily="34" charset="-120"/>
+            </a:endParaRPr>
           </a:p>
           <a:p>
             <a:pPr marL="0" indent="0" algn="ctr">
@@ -8025,18 +8376,14 @@
               </a:spcAft>
               <a:buNone/>
             </a:pPr>
-            <a:r>
-              <a:rPr lang="en-US" sz="1350" i="1" dirty="0">
-                <a:solidFill>
-                  <a:srgbClr val="F5EFE4"/>
-                </a:solidFill>
-                <a:latin typeface="Cambria" pitchFamily="34" charset="0"/>
-                <a:ea typeface="Cambria" pitchFamily="34" charset="-122"/>
-                <a:cs typeface="Cambria" pitchFamily="34" charset="-120"/>
-              </a:rPr>
-              <a:t>que le sentier qui descend est le sentier qui monte,</a:t>
-            </a:r>
-            <a:endParaRPr lang="en-US" sz="1350" dirty="0"/>
+            <a:endParaRPr lang="en-US" sz="2000" i="1" dirty="0">
+              <a:solidFill>
+                <a:srgbClr val="F5EFE4"/>
+              </a:solidFill>
+              <a:latin typeface="Cambria" panose="02040503050406030204" pitchFamily="18" charset="0"/>
+              <a:ea typeface="Cambria" panose="02040503050406030204" pitchFamily="18" charset="0"/>
+              <a:cs typeface="Cambria" pitchFamily="34" charset="-120"/>
+            </a:endParaRPr>
           </a:p>
           <a:p>
             <a:pPr marL="0" indent="0" algn="l">
@@ -8049,17 +8396,86 @@
               <a:buNone/>
             </a:pPr>
             <a:r>
-              <a:rPr lang="en-US" sz="1350" i="1" dirty="0">
-                <a:solidFill>
-                  <a:srgbClr val="F5EFE4"/>
-                </a:solidFill>
-                <a:latin typeface="Cambria" pitchFamily="34" charset="0"/>
-                <a:ea typeface="Cambria" pitchFamily="34" charset="-122"/>
-                <a:cs typeface="Cambria" pitchFamily="34" charset="-120"/>
-              </a:rPr>
-              <a:t>qu'être abaissé c'est être élevé,</a:t>
-            </a:r>
-            <a:endParaRPr lang="en-US" sz="1350" dirty="0"/>
+              <a:rPr lang="en-US" sz="2000" i="1" dirty="0">
+                <a:solidFill>
+                  <a:srgbClr val="F5EFE4"/>
+                </a:solidFill>
+                <a:latin typeface="Cambria" panose="02040503050406030204" pitchFamily="18" charset="0"/>
+                <a:ea typeface="Cambria" panose="02040503050406030204" pitchFamily="18" charset="0"/>
+                <a:cs typeface="Cambria" pitchFamily="34" charset="-120"/>
+              </a:rPr>
+              <a:t>- </a:t>
+            </a:r>
+            <a:r>
+              <a:rPr lang="en-US" sz="2000" i="1" dirty="0" err="1">
+                <a:solidFill>
+                  <a:srgbClr val="F5EFE4"/>
+                </a:solidFill>
+                <a:latin typeface="Cambria" panose="02040503050406030204" pitchFamily="18" charset="0"/>
+                <a:ea typeface="Cambria" panose="02040503050406030204" pitchFamily="18" charset="0"/>
+                <a:cs typeface="Cambria" pitchFamily="34" charset="-120"/>
+              </a:rPr>
+              <a:t>que</a:t>
+            </a:r>
+            <a:r>
+              <a:rPr lang="en-US" sz="2000" i="1" dirty="0">
+                <a:solidFill>
+                  <a:srgbClr val="F5EFE4"/>
+                </a:solidFill>
+                <a:latin typeface="Cambria" panose="02040503050406030204" pitchFamily="18" charset="0"/>
+                <a:ea typeface="Cambria" panose="02040503050406030204" pitchFamily="18" charset="0"/>
+                <a:cs typeface="Cambria" pitchFamily="34" charset="-120"/>
+              </a:rPr>
+              <a:t> le </a:t>
+            </a:r>
+            <a:r>
+              <a:rPr lang="en-US" sz="2000" i="1" dirty="0" err="1">
+                <a:solidFill>
+                  <a:srgbClr val="F5EFE4"/>
+                </a:solidFill>
+                <a:latin typeface="Cambria" panose="02040503050406030204" pitchFamily="18" charset="0"/>
+                <a:ea typeface="Cambria" panose="02040503050406030204" pitchFamily="18" charset="0"/>
+                <a:cs typeface="Cambria" pitchFamily="34" charset="-120"/>
+              </a:rPr>
+              <a:t>sentier</a:t>
+            </a:r>
+            <a:r>
+              <a:rPr lang="en-US" sz="2000" i="1" dirty="0">
+                <a:solidFill>
+                  <a:srgbClr val="F5EFE4"/>
+                </a:solidFill>
+                <a:latin typeface="Cambria" panose="02040503050406030204" pitchFamily="18" charset="0"/>
+                <a:ea typeface="Cambria" panose="02040503050406030204" pitchFamily="18" charset="0"/>
+                <a:cs typeface="Cambria" pitchFamily="34" charset="-120"/>
+              </a:rPr>
+              <a:t> qui descend est le </a:t>
+            </a:r>
+            <a:r>
+              <a:rPr lang="en-US" sz="2000" i="1" dirty="0" err="1">
+                <a:solidFill>
+                  <a:srgbClr val="F5EFE4"/>
+                </a:solidFill>
+                <a:latin typeface="Cambria" panose="02040503050406030204" pitchFamily="18" charset="0"/>
+                <a:ea typeface="Cambria" panose="02040503050406030204" pitchFamily="18" charset="0"/>
+                <a:cs typeface="Cambria" pitchFamily="34" charset="-120"/>
+              </a:rPr>
+              <a:t>sentier</a:t>
+            </a:r>
+            <a:r>
+              <a:rPr lang="en-US" sz="2000" i="1" dirty="0">
+                <a:solidFill>
+                  <a:srgbClr val="F5EFE4"/>
+                </a:solidFill>
+                <a:latin typeface="Cambria" panose="02040503050406030204" pitchFamily="18" charset="0"/>
+                <a:ea typeface="Cambria" panose="02040503050406030204" pitchFamily="18" charset="0"/>
+                <a:cs typeface="Cambria" pitchFamily="34" charset="-120"/>
+              </a:rPr>
+              <a:t> qui monte,</a:t>
+            </a:r>
+            <a:endParaRPr lang="en-US" sz="2000" dirty="0">
+              <a:latin typeface="Cambria" panose="02040503050406030204" pitchFamily="18" charset="0"/>
+              <a:ea typeface="Cambria" panose="02040503050406030204" pitchFamily="18" charset="0"/>
+            </a:endParaRPr>
           </a:p>
           <a:p>
             <a:pPr marL="0" indent="0" algn="l">
@@ -8071,18 +8487,14 @@
               </a:spcAft>
               <a:buNone/>
             </a:pPr>
-            <a:r>
-              <a:rPr lang="en-US" sz="1350" i="1" dirty="0">
-                <a:solidFill>
-                  <a:srgbClr val="F5EFE4"/>
-                </a:solidFill>
-                <a:latin typeface="Cambria" pitchFamily="34" charset="0"/>
-                <a:ea typeface="Cambria" pitchFamily="34" charset="-122"/>
-                <a:cs typeface="Cambria" pitchFamily="34" charset="-120"/>
-              </a:rPr>
-              <a:t>que le cœur brisé c'est le cœur guéri,</a:t>
-            </a:r>
-            <a:endParaRPr lang="en-US" sz="1350" dirty="0"/>
+            <a:endParaRPr lang="en-US" sz="2000" i="1" dirty="0">
+              <a:solidFill>
+                <a:srgbClr val="F5EFE4"/>
+              </a:solidFill>
+              <a:latin typeface="Cambria" panose="02040503050406030204" pitchFamily="18" charset="0"/>
+              <a:ea typeface="Cambria" panose="02040503050406030204" pitchFamily="18" charset="0"/>
+              <a:cs typeface="Cambria" pitchFamily="34" charset="-120"/>
+            </a:endParaRPr>
           </a:p>
           <a:p>
             <a:pPr marL="0" indent="0" algn="l">
@@ -8095,17 +8507,130 @@
               <a:buNone/>
             </a:pPr>
             <a:r>
-              <a:rPr lang="en-US" sz="1350" i="1" dirty="0">
-                <a:solidFill>
-                  <a:srgbClr val="F5EFE4"/>
-                </a:solidFill>
-                <a:latin typeface="Cambria" pitchFamily="34" charset="0"/>
-                <a:ea typeface="Cambria" pitchFamily="34" charset="-122"/>
-                <a:cs typeface="Cambria" pitchFamily="34" charset="-120"/>
-              </a:rPr>
-              <a:t>que l'esprit contrit c'est l'esprit qui se réjouit,</a:t>
-            </a:r>
-            <a:endParaRPr lang="en-US" sz="1350" dirty="0"/>
+              <a:rPr lang="en-US" sz="2000" i="1" dirty="0">
+                <a:solidFill>
+                  <a:srgbClr val="F5EFE4"/>
+                </a:solidFill>
+                <a:latin typeface="Cambria" panose="02040503050406030204" pitchFamily="18" charset="0"/>
+                <a:ea typeface="Cambria" panose="02040503050406030204" pitchFamily="18" charset="0"/>
+                <a:cs typeface="Cambria" pitchFamily="34" charset="-120"/>
+              </a:rPr>
+              <a:t>- </a:t>
+            </a:r>
+            <a:r>
+              <a:rPr lang="en-US" sz="2000" i="1" dirty="0" err="1">
+                <a:solidFill>
+                  <a:srgbClr val="F5EFE4"/>
+                </a:solidFill>
+                <a:latin typeface="Cambria" panose="02040503050406030204" pitchFamily="18" charset="0"/>
+                <a:ea typeface="Cambria" panose="02040503050406030204" pitchFamily="18" charset="0"/>
+                <a:cs typeface="Cambria" pitchFamily="34" charset="-120"/>
+              </a:rPr>
+              <a:t>qu'être</a:t>
+            </a:r>
+            <a:r>
+              <a:rPr lang="en-US" sz="2000" i="1" dirty="0">
+                <a:solidFill>
+                  <a:srgbClr val="F5EFE4"/>
+                </a:solidFill>
+                <a:latin typeface="Cambria" panose="02040503050406030204" pitchFamily="18" charset="0"/>
+                <a:ea typeface="Cambria" panose="02040503050406030204" pitchFamily="18" charset="0"/>
+                <a:cs typeface="Cambria" pitchFamily="34" charset="-120"/>
+              </a:rPr>
+              <a:t> </a:t>
+            </a:r>
+            <a:r>
+              <a:rPr lang="en-US" sz="2000" i="1" dirty="0" err="1">
+                <a:solidFill>
+                  <a:srgbClr val="F5EFE4"/>
+                </a:solidFill>
+                <a:latin typeface="Cambria" panose="02040503050406030204" pitchFamily="18" charset="0"/>
+                <a:ea typeface="Cambria" panose="02040503050406030204" pitchFamily="18" charset="0"/>
+                <a:cs typeface="Cambria" pitchFamily="34" charset="-120"/>
+              </a:rPr>
+              <a:t>abaissé</a:t>
+            </a:r>
+            <a:r>
+              <a:rPr lang="en-US" sz="2000" i="1" dirty="0">
+                <a:solidFill>
+                  <a:srgbClr val="F5EFE4"/>
+                </a:solidFill>
+                <a:latin typeface="Cambria" panose="02040503050406030204" pitchFamily="18" charset="0"/>
+                <a:ea typeface="Cambria" panose="02040503050406030204" pitchFamily="18" charset="0"/>
+                <a:cs typeface="Cambria" pitchFamily="34" charset="-120"/>
+              </a:rPr>
+              <a:t> </a:t>
+            </a:r>
+            <a:r>
+              <a:rPr lang="en-US" sz="2000" i="1" dirty="0" err="1">
+                <a:solidFill>
+                  <a:srgbClr val="F5EFE4"/>
+                </a:solidFill>
+                <a:latin typeface="Cambria" panose="02040503050406030204" pitchFamily="18" charset="0"/>
+                <a:ea typeface="Cambria" panose="02040503050406030204" pitchFamily="18" charset="0"/>
+                <a:cs typeface="Cambria" pitchFamily="34" charset="-120"/>
+              </a:rPr>
+              <a:t>c'est</a:t>
+            </a:r>
+            <a:r>
+              <a:rPr lang="en-US" sz="2000" i="1" dirty="0">
+                <a:solidFill>
+                  <a:srgbClr val="F5EFE4"/>
+                </a:solidFill>
+                <a:latin typeface="Cambria" panose="02040503050406030204" pitchFamily="18" charset="0"/>
+                <a:ea typeface="Cambria" panose="02040503050406030204" pitchFamily="18" charset="0"/>
+                <a:cs typeface="Cambria" pitchFamily="34" charset="-120"/>
+              </a:rPr>
+              <a:t> </a:t>
+            </a:r>
+            <a:r>
+              <a:rPr lang="en-US" sz="2000" i="1" dirty="0" err="1">
+                <a:solidFill>
+                  <a:srgbClr val="F5EFE4"/>
+                </a:solidFill>
+                <a:latin typeface="Cambria" panose="02040503050406030204" pitchFamily="18" charset="0"/>
+                <a:ea typeface="Cambria" panose="02040503050406030204" pitchFamily="18" charset="0"/>
+                <a:cs typeface="Cambria" pitchFamily="34" charset="-120"/>
+              </a:rPr>
+              <a:t>être</a:t>
+            </a:r>
+            <a:r>
+              <a:rPr lang="en-US" sz="2000" i="1" dirty="0">
+                <a:solidFill>
+                  <a:srgbClr val="F5EFE4"/>
+                </a:solidFill>
+                <a:latin typeface="Cambria" panose="02040503050406030204" pitchFamily="18" charset="0"/>
+                <a:ea typeface="Cambria" panose="02040503050406030204" pitchFamily="18" charset="0"/>
+                <a:cs typeface="Cambria" pitchFamily="34" charset="-120"/>
+              </a:rPr>
+              <a:t> </a:t>
+            </a:r>
+            <a:r>
+              <a:rPr lang="en-US" sz="2000" i="1" dirty="0" err="1">
+                <a:solidFill>
+                  <a:srgbClr val="F5EFE4"/>
+                </a:solidFill>
+                <a:latin typeface="Cambria" panose="02040503050406030204" pitchFamily="18" charset="0"/>
+                <a:ea typeface="Cambria" panose="02040503050406030204" pitchFamily="18" charset="0"/>
+                <a:cs typeface="Cambria" pitchFamily="34" charset="-120"/>
+              </a:rPr>
+              <a:t>élevé</a:t>
+            </a:r>
+            <a:r>
+              <a:rPr lang="en-US" sz="2000" i="1" dirty="0">
+                <a:solidFill>
+                  <a:srgbClr val="F5EFE4"/>
+                </a:solidFill>
+                <a:latin typeface="Cambria" panose="02040503050406030204" pitchFamily="18" charset="0"/>
+                <a:ea typeface="Cambria" panose="02040503050406030204" pitchFamily="18" charset="0"/>
+                <a:cs typeface="Cambria" pitchFamily="34" charset="-120"/>
+              </a:rPr>
+              <a:t>,</a:t>
+            </a:r>
+            <a:endParaRPr lang="en-US" sz="2000" dirty="0">
+              <a:latin typeface="Cambria" panose="02040503050406030204" pitchFamily="18" charset="0"/>
+              <a:ea typeface="Cambria" panose="02040503050406030204" pitchFamily="18" charset="0"/>
+            </a:endParaRPr>
           </a:p>
           <a:p>
             <a:pPr marL="0" indent="0" algn="l">
@@ -8118,17 +8643,152 @@
               <a:buNone/>
             </a:pPr>
             <a:r>
-              <a:rPr lang="en-US" sz="1350" i="1" dirty="0">
-                <a:solidFill>
-                  <a:srgbClr val="F5EFE4"/>
-                </a:solidFill>
-                <a:latin typeface="Cambria" pitchFamily="34" charset="0"/>
-                <a:ea typeface="Cambria" pitchFamily="34" charset="-122"/>
-                <a:cs typeface="Cambria" pitchFamily="34" charset="-120"/>
-              </a:rPr>
-              <a:t>que l'âme repentante c'est l'âme victorieuse,</a:t>
-            </a:r>
-            <a:endParaRPr lang="en-US" sz="1350" dirty="0"/>
+              <a:rPr lang="en-US" sz="2000" i="1" dirty="0">
+                <a:solidFill>
+                  <a:srgbClr val="F5EFE4"/>
+                </a:solidFill>
+                <a:latin typeface="Cambria" panose="02040503050406030204" pitchFamily="18" charset="0"/>
+                <a:ea typeface="Cambria" panose="02040503050406030204" pitchFamily="18" charset="0"/>
+                <a:cs typeface="Cambria" pitchFamily="34" charset="-120"/>
+              </a:rPr>
+              <a:t>- </a:t>
+            </a:r>
+            <a:r>
+              <a:rPr lang="en-US" sz="2000" i="1" dirty="0" err="1">
+                <a:solidFill>
+                  <a:srgbClr val="F5EFE4"/>
+                </a:solidFill>
+                <a:latin typeface="Cambria" panose="02040503050406030204" pitchFamily="18" charset="0"/>
+                <a:ea typeface="Cambria" panose="02040503050406030204" pitchFamily="18" charset="0"/>
+                <a:cs typeface="Cambria" pitchFamily="34" charset="-120"/>
+              </a:rPr>
+              <a:t>que</a:t>
+            </a:r>
+            <a:r>
+              <a:rPr lang="en-US" sz="2000" i="1" dirty="0">
+                <a:solidFill>
+                  <a:srgbClr val="F5EFE4"/>
+                </a:solidFill>
+                <a:latin typeface="Cambria" panose="02040503050406030204" pitchFamily="18" charset="0"/>
+                <a:ea typeface="Cambria" panose="02040503050406030204" pitchFamily="18" charset="0"/>
+                <a:cs typeface="Cambria" pitchFamily="34" charset="-120"/>
+              </a:rPr>
+              <a:t> le </a:t>
+            </a:r>
+            <a:r>
+              <a:rPr lang="en-US" sz="2000" i="1" dirty="0" err="1">
+                <a:solidFill>
+                  <a:srgbClr val="F5EFE4"/>
+                </a:solidFill>
+                <a:latin typeface="Cambria" panose="02040503050406030204" pitchFamily="18" charset="0"/>
+                <a:ea typeface="Cambria" panose="02040503050406030204" pitchFamily="18" charset="0"/>
+                <a:cs typeface="Cambria" pitchFamily="34" charset="-120"/>
+              </a:rPr>
+              <a:t>cœur</a:t>
+            </a:r>
+            <a:r>
+              <a:rPr lang="en-US" sz="2000" i="1" dirty="0">
+                <a:solidFill>
+                  <a:srgbClr val="F5EFE4"/>
+                </a:solidFill>
+                <a:latin typeface="Cambria" panose="02040503050406030204" pitchFamily="18" charset="0"/>
+                <a:ea typeface="Cambria" panose="02040503050406030204" pitchFamily="18" charset="0"/>
+                <a:cs typeface="Cambria" pitchFamily="34" charset="-120"/>
+              </a:rPr>
+              <a:t> </a:t>
+            </a:r>
+            <a:r>
+              <a:rPr lang="en-US" sz="2000" i="1" dirty="0" err="1">
+                <a:solidFill>
+                  <a:srgbClr val="F5EFE4"/>
+                </a:solidFill>
+                <a:latin typeface="Cambria" panose="02040503050406030204" pitchFamily="18" charset="0"/>
+                <a:ea typeface="Cambria" panose="02040503050406030204" pitchFamily="18" charset="0"/>
+                <a:cs typeface="Cambria" pitchFamily="34" charset="-120"/>
+              </a:rPr>
+              <a:t>brisé</a:t>
+            </a:r>
+            <a:r>
+              <a:rPr lang="en-US" sz="2000" i="1" dirty="0">
+                <a:solidFill>
+                  <a:srgbClr val="F5EFE4"/>
+                </a:solidFill>
+                <a:latin typeface="Cambria" panose="02040503050406030204" pitchFamily="18" charset="0"/>
+                <a:ea typeface="Cambria" panose="02040503050406030204" pitchFamily="18" charset="0"/>
+                <a:cs typeface="Cambria" pitchFamily="34" charset="-120"/>
+              </a:rPr>
+              <a:t> </a:t>
+            </a:r>
+            <a:r>
+              <a:rPr lang="en-US" sz="2000" i="1" dirty="0" err="1">
+                <a:solidFill>
+                  <a:srgbClr val="F5EFE4"/>
+                </a:solidFill>
+                <a:latin typeface="Cambria" panose="02040503050406030204" pitchFamily="18" charset="0"/>
+                <a:ea typeface="Cambria" panose="02040503050406030204" pitchFamily="18" charset="0"/>
+                <a:cs typeface="Cambria" pitchFamily="34" charset="-120"/>
+              </a:rPr>
+              <a:t>c'est</a:t>
+            </a:r>
+            <a:r>
+              <a:rPr lang="en-US" sz="2000" i="1" dirty="0">
+                <a:solidFill>
+                  <a:srgbClr val="F5EFE4"/>
+                </a:solidFill>
+                <a:latin typeface="Cambria" panose="02040503050406030204" pitchFamily="18" charset="0"/>
+                <a:ea typeface="Cambria" panose="02040503050406030204" pitchFamily="18" charset="0"/>
+                <a:cs typeface="Cambria" pitchFamily="34" charset="-120"/>
+              </a:rPr>
+              <a:t> le </a:t>
+            </a:r>
+            <a:r>
+              <a:rPr lang="en-US" sz="2000" i="1" dirty="0" err="1">
+                <a:solidFill>
+                  <a:srgbClr val="F5EFE4"/>
+                </a:solidFill>
+                <a:latin typeface="Cambria" panose="02040503050406030204" pitchFamily="18" charset="0"/>
+                <a:ea typeface="Cambria" panose="02040503050406030204" pitchFamily="18" charset="0"/>
+                <a:cs typeface="Cambria" pitchFamily="34" charset="-120"/>
+              </a:rPr>
+              <a:t>cœur</a:t>
+            </a:r>
+            <a:r>
+              <a:rPr lang="en-US" sz="2000" i="1" dirty="0">
+                <a:solidFill>
+                  <a:srgbClr val="F5EFE4"/>
+                </a:solidFill>
+                <a:latin typeface="Cambria" panose="02040503050406030204" pitchFamily="18" charset="0"/>
+                <a:ea typeface="Cambria" panose="02040503050406030204" pitchFamily="18" charset="0"/>
+                <a:cs typeface="Cambria" pitchFamily="34" charset="-120"/>
+              </a:rPr>
+              <a:t> </a:t>
+            </a:r>
+            <a:r>
+              <a:rPr lang="en-US" sz="2000" i="1" dirty="0" err="1">
+                <a:solidFill>
+                  <a:srgbClr val="F5EFE4"/>
+                </a:solidFill>
+                <a:latin typeface="Cambria" panose="02040503050406030204" pitchFamily="18" charset="0"/>
+                <a:ea typeface="Cambria" panose="02040503050406030204" pitchFamily="18" charset="0"/>
+                <a:cs typeface="Cambria" pitchFamily="34" charset="-120"/>
+              </a:rPr>
+              <a:t>guéri</a:t>
+            </a:r>
+            <a:r>
+              <a:rPr lang="en-US" sz="2000" i="1" dirty="0">
+                <a:solidFill>
+                  <a:srgbClr val="F5EFE4"/>
+                </a:solidFill>
+                <a:latin typeface="Cambria" panose="02040503050406030204" pitchFamily="18" charset="0"/>
+                <a:ea typeface="Cambria" panose="02040503050406030204" pitchFamily="18" charset="0"/>
+                <a:cs typeface="Cambria" pitchFamily="34" charset="-120"/>
+              </a:rPr>
+              <a:t>,</a:t>
+            </a:r>
+            <a:endParaRPr lang="en-US" sz="2000" dirty="0">
+              <a:latin typeface="Cambria" panose="02040503050406030204" pitchFamily="18" charset="0"/>
+              <a:ea typeface="Cambria" panose="02040503050406030204" pitchFamily="18" charset="0"/>
+            </a:endParaRPr>
           </a:p>
           <a:p>
             <a:pPr marL="0" indent="0" algn="l">
@@ -8141,17 +8801,152 @@
               <a:buNone/>
             </a:pPr>
             <a:r>
-              <a:rPr lang="en-US" sz="1350" i="1" dirty="0">
-                <a:solidFill>
-                  <a:srgbClr val="F5EFE4"/>
-                </a:solidFill>
-                <a:latin typeface="Cambria" pitchFamily="34" charset="0"/>
-                <a:ea typeface="Cambria" pitchFamily="34" charset="-122"/>
-                <a:cs typeface="Cambria" pitchFamily="34" charset="-120"/>
-              </a:rPr>
-              <a:t>que ne rien avoir c'est tout posséder,</a:t>
-            </a:r>
-            <a:endParaRPr lang="en-US" sz="1350" dirty="0"/>
+              <a:rPr lang="en-US" sz="2000" i="1" dirty="0">
+                <a:solidFill>
+                  <a:srgbClr val="F5EFE4"/>
+                </a:solidFill>
+                <a:latin typeface="Cambria" panose="02040503050406030204" pitchFamily="18" charset="0"/>
+                <a:ea typeface="Cambria" panose="02040503050406030204" pitchFamily="18" charset="0"/>
+                <a:cs typeface="Cambria" pitchFamily="34" charset="-120"/>
+              </a:rPr>
+              <a:t>- </a:t>
+            </a:r>
+            <a:r>
+              <a:rPr lang="en-US" sz="2000" i="1" dirty="0" err="1">
+                <a:solidFill>
+                  <a:srgbClr val="F5EFE4"/>
+                </a:solidFill>
+                <a:latin typeface="Cambria" panose="02040503050406030204" pitchFamily="18" charset="0"/>
+                <a:ea typeface="Cambria" panose="02040503050406030204" pitchFamily="18" charset="0"/>
+                <a:cs typeface="Cambria" pitchFamily="34" charset="-120"/>
+              </a:rPr>
+              <a:t>que</a:t>
+            </a:r>
+            <a:r>
+              <a:rPr lang="en-US" sz="2000" i="1" dirty="0">
+                <a:solidFill>
+                  <a:srgbClr val="F5EFE4"/>
+                </a:solidFill>
+                <a:latin typeface="Cambria" panose="02040503050406030204" pitchFamily="18" charset="0"/>
+                <a:ea typeface="Cambria" panose="02040503050406030204" pitchFamily="18" charset="0"/>
+                <a:cs typeface="Cambria" pitchFamily="34" charset="-120"/>
+              </a:rPr>
+              <a:t> </a:t>
+            </a:r>
+            <a:r>
+              <a:rPr lang="en-US" sz="2000" i="1" dirty="0" err="1">
+                <a:solidFill>
+                  <a:srgbClr val="F5EFE4"/>
+                </a:solidFill>
+                <a:latin typeface="Cambria" panose="02040503050406030204" pitchFamily="18" charset="0"/>
+                <a:ea typeface="Cambria" panose="02040503050406030204" pitchFamily="18" charset="0"/>
+                <a:cs typeface="Cambria" pitchFamily="34" charset="-120"/>
+              </a:rPr>
+              <a:t>l'esprit</a:t>
+            </a:r>
+            <a:r>
+              <a:rPr lang="en-US" sz="2000" i="1" dirty="0">
+                <a:solidFill>
+                  <a:srgbClr val="F5EFE4"/>
+                </a:solidFill>
+                <a:latin typeface="Cambria" panose="02040503050406030204" pitchFamily="18" charset="0"/>
+                <a:ea typeface="Cambria" panose="02040503050406030204" pitchFamily="18" charset="0"/>
+                <a:cs typeface="Cambria" pitchFamily="34" charset="-120"/>
+              </a:rPr>
+              <a:t> </a:t>
+            </a:r>
+            <a:r>
+              <a:rPr lang="en-US" sz="2000" i="1" dirty="0" err="1">
+                <a:solidFill>
+                  <a:srgbClr val="F5EFE4"/>
+                </a:solidFill>
+                <a:latin typeface="Cambria" panose="02040503050406030204" pitchFamily="18" charset="0"/>
+                <a:ea typeface="Cambria" panose="02040503050406030204" pitchFamily="18" charset="0"/>
+                <a:cs typeface="Cambria" pitchFamily="34" charset="-120"/>
+              </a:rPr>
+              <a:t>contrit</a:t>
+            </a:r>
+            <a:r>
+              <a:rPr lang="en-US" sz="2000" i="1" dirty="0">
+                <a:solidFill>
+                  <a:srgbClr val="F5EFE4"/>
+                </a:solidFill>
+                <a:latin typeface="Cambria" panose="02040503050406030204" pitchFamily="18" charset="0"/>
+                <a:ea typeface="Cambria" panose="02040503050406030204" pitchFamily="18" charset="0"/>
+                <a:cs typeface="Cambria" pitchFamily="34" charset="-120"/>
+              </a:rPr>
+              <a:t> </a:t>
+            </a:r>
+            <a:r>
+              <a:rPr lang="en-US" sz="2000" i="1" dirty="0" err="1">
+                <a:solidFill>
+                  <a:srgbClr val="F5EFE4"/>
+                </a:solidFill>
+                <a:latin typeface="Cambria" panose="02040503050406030204" pitchFamily="18" charset="0"/>
+                <a:ea typeface="Cambria" panose="02040503050406030204" pitchFamily="18" charset="0"/>
+                <a:cs typeface="Cambria" pitchFamily="34" charset="-120"/>
+              </a:rPr>
+              <a:t>c'est</a:t>
+            </a:r>
+            <a:r>
+              <a:rPr lang="en-US" sz="2000" i="1" dirty="0">
+                <a:solidFill>
+                  <a:srgbClr val="F5EFE4"/>
+                </a:solidFill>
+                <a:latin typeface="Cambria" panose="02040503050406030204" pitchFamily="18" charset="0"/>
+                <a:ea typeface="Cambria" panose="02040503050406030204" pitchFamily="18" charset="0"/>
+                <a:cs typeface="Cambria" pitchFamily="34" charset="-120"/>
+              </a:rPr>
+              <a:t> </a:t>
+            </a:r>
+            <a:r>
+              <a:rPr lang="en-US" sz="2000" i="1" dirty="0" err="1">
+                <a:solidFill>
+                  <a:srgbClr val="F5EFE4"/>
+                </a:solidFill>
+                <a:latin typeface="Cambria" panose="02040503050406030204" pitchFamily="18" charset="0"/>
+                <a:ea typeface="Cambria" panose="02040503050406030204" pitchFamily="18" charset="0"/>
+                <a:cs typeface="Cambria" pitchFamily="34" charset="-120"/>
+              </a:rPr>
+              <a:t>l'esprit</a:t>
+            </a:r>
+            <a:r>
+              <a:rPr lang="en-US" sz="2000" i="1" dirty="0">
+                <a:solidFill>
+                  <a:srgbClr val="F5EFE4"/>
+                </a:solidFill>
+                <a:latin typeface="Cambria" panose="02040503050406030204" pitchFamily="18" charset="0"/>
+                <a:ea typeface="Cambria" panose="02040503050406030204" pitchFamily="18" charset="0"/>
+                <a:cs typeface="Cambria" pitchFamily="34" charset="-120"/>
+              </a:rPr>
+              <a:t> qui se </a:t>
+            </a:r>
+            <a:r>
+              <a:rPr lang="en-US" sz="2000" i="1" dirty="0" err="1">
+                <a:solidFill>
+                  <a:srgbClr val="F5EFE4"/>
+                </a:solidFill>
+                <a:latin typeface="Cambria" panose="02040503050406030204" pitchFamily="18" charset="0"/>
+                <a:ea typeface="Cambria" panose="02040503050406030204" pitchFamily="18" charset="0"/>
+                <a:cs typeface="Cambria" pitchFamily="34" charset="-120"/>
+              </a:rPr>
+              <a:t>réjouit</a:t>
+            </a:r>
+            <a:r>
+              <a:rPr lang="en-US" sz="2000" i="1" dirty="0">
+                <a:solidFill>
+                  <a:srgbClr val="F5EFE4"/>
+                </a:solidFill>
+                <a:latin typeface="Cambria" panose="02040503050406030204" pitchFamily="18" charset="0"/>
+                <a:ea typeface="Cambria" panose="02040503050406030204" pitchFamily="18" charset="0"/>
+                <a:cs typeface="Cambria" pitchFamily="34" charset="-120"/>
+              </a:rPr>
+              <a:t>,</a:t>
+            </a:r>
+            <a:endParaRPr lang="en-US" sz="2000" dirty="0">
+              <a:latin typeface="Cambria" panose="02040503050406030204" pitchFamily="18" charset="0"/>
+              <a:ea typeface="Cambria" panose="02040503050406030204" pitchFamily="18" charset="0"/>
+            </a:endParaRPr>
           </a:p>
           <a:p>
             <a:pPr marL="0" indent="0" algn="l">
@@ -8164,17 +8959,152 @@
               <a:buNone/>
             </a:pPr>
             <a:r>
-              <a:rPr lang="en-US" sz="1350" i="1" dirty="0">
-                <a:solidFill>
-                  <a:srgbClr val="F5EFE4"/>
-                </a:solidFill>
-                <a:latin typeface="Cambria" pitchFamily="34" charset="0"/>
-                <a:ea typeface="Cambria" pitchFamily="34" charset="-122"/>
-                <a:cs typeface="Cambria" pitchFamily="34" charset="-120"/>
-              </a:rPr>
-              <a:t>que porter la croix c'est porter de la couronne,</a:t>
-            </a:r>
-            <a:endParaRPr lang="en-US" sz="1350" dirty="0"/>
+              <a:rPr lang="en-US" sz="2000" i="1" dirty="0">
+                <a:solidFill>
+                  <a:srgbClr val="F5EFE4"/>
+                </a:solidFill>
+                <a:latin typeface="Cambria" panose="02040503050406030204" pitchFamily="18" charset="0"/>
+                <a:ea typeface="Cambria" panose="02040503050406030204" pitchFamily="18" charset="0"/>
+                <a:cs typeface="Cambria" pitchFamily="34" charset="-120"/>
+              </a:rPr>
+              <a:t>- </a:t>
+            </a:r>
+            <a:r>
+              <a:rPr lang="en-US" sz="2000" i="1" dirty="0" err="1">
+                <a:solidFill>
+                  <a:srgbClr val="F5EFE4"/>
+                </a:solidFill>
+                <a:latin typeface="Cambria" panose="02040503050406030204" pitchFamily="18" charset="0"/>
+                <a:ea typeface="Cambria" panose="02040503050406030204" pitchFamily="18" charset="0"/>
+                <a:cs typeface="Cambria" pitchFamily="34" charset="-120"/>
+              </a:rPr>
+              <a:t>que</a:t>
+            </a:r>
+            <a:r>
+              <a:rPr lang="en-US" sz="2000" i="1" dirty="0">
+                <a:solidFill>
+                  <a:srgbClr val="F5EFE4"/>
+                </a:solidFill>
+                <a:latin typeface="Cambria" panose="02040503050406030204" pitchFamily="18" charset="0"/>
+                <a:ea typeface="Cambria" panose="02040503050406030204" pitchFamily="18" charset="0"/>
+                <a:cs typeface="Cambria" pitchFamily="34" charset="-120"/>
+              </a:rPr>
+              <a:t> </a:t>
+            </a:r>
+            <a:r>
+              <a:rPr lang="en-US" sz="2000" i="1" dirty="0" err="1">
+                <a:solidFill>
+                  <a:srgbClr val="F5EFE4"/>
+                </a:solidFill>
+                <a:latin typeface="Cambria" panose="02040503050406030204" pitchFamily="18" charset="0"/>
+                <a:ea typeface="Cambria" panose="02040503050406030204" pitchFamily="18" charset="0"/>
+                <a:cs typeface="Cambria" pitchFamily="34" charset="-120"/>
+              </a:rPr>
+              <a:t>l'âme</a:t>
+            </a:r>
+            <a:r>
+              <a:rPr lang="en-US" sz="2000" i="1" dirty="0">
+                <a:solidFill>
+                  <a:srgbClr val="F5EFE4"/>
+                </a:solidFill>
+                <a:latin typeface="Cambria" panose="02040503050406030204" pitchFamily="18" charset="0"/>
+                <a:ea typeface="Cambria" panose="02040503050406030204" pitchFamily="18" charset="0"/>
+                <a:cs typeface="Cambria" pitchFamily="34" charset="-120"/>
+              </a:rPr>
+              <a:t> </a:t>
+            </a:r>
+            <a:r>
+              <a:rPr lang="en-US" sz="2000" i="1" dirty="0" err="1">
+                <a:solidFill>
+                  <a:srgbClr val="F5EFE4"/>
+                </a:solidFill>
+                <a:latin typeface="Cambria" panose="02040503050406030204" pitchFamily="18" charset="0"/>
+                <a:ea typeface="Cambria" panose="02040503050406030204" pitchFamily="18" charset="0"/>
+                <a:cs typeface="Cambria" pitchFamily="34" charset="-120"/>
+              </a:rPr>
+              <a:t>repentante</a:t>
+            </a:r>
+            <a:r>
+              <a:rPr lang="en-US" sz="2000" i="1" dirty="0">
+                <a:solidFill>
+                  <a:srgbClr val="F5EFE4"/>
+                </a:solidFill>
+                <a:latin typeface="Cambria" panose="02040503050406030204" pitchFamily="18" charset="0"/>
+                <a:ea typeface="Cambria" panose="02040503050406030204" pitchFamily="18" charset="0"/>
+                <a:cs typeface="Cambria" pitchFamily="34" charset="-120"/>
+              </a:rPr>
+              <a:t> </a:t>
+            </a:r>
+            <a:r>
+              <a:rPr lang="en-US" sz="2000" i="1" dirty="0" err="1">
+                <a:solidFill>
+                  <a:srgbClr val="F5EFE4"/>
+                </a:solidFill>
+                <a:latin typeface="Cambria" panose="02040503050406030204" pitchFamily="18" charset="0"/>
+                <a:ea typeface="Cambria" panose="02040503050406030204" pitchFamily="18" charset="0"/>
+                <a:cs typeface="Cambria" pitchFamily="34" charset="-120"/>
+              </a:rPr>
+              <a:t>c'est</a:t>
+            </a:r>
+            <a:r>
+              <a:rPr lang="en-US" sz="2000" i="1" dirty="0">
+                <a:solidFill>
+                  <a:srgbClr val="F5EFE4"/>
+                </a:solidFill>
+                <a:latin typeface="Cambria" panose="02040503050406030204" pitchFamily="18" charset="0"/>
+                <a:ea typeface="Cambria" panose="02040503050406030204" pitchFamily="18" charset="0"/>
+                <a:cs typeface="Cambria" pitchFamily="34" charset="-120"/>
+              </a:rPr>
+              <a:t> </a:t>
+            </a:r>
+            <a:r>
+              <a:rPr lang="en-US" sz="2000" i="1" dirty="0" err="1">
+                <a:solidFill>
+                  <a:srgbClr val="F5EFE4"/>
+                </a:solidFill>
+                <a:latin typeface="Cambria" panose="02040503050406030204" pitchFamily="18" charset="0"/>
+                <a:ea typeface="Cambria" panose="02040503050406030204" pitchFamily="18" charset="0"/>
+                <a:cs typeface="Cambria" pitchFamily="34" charset="-120"/>
+              </a:rPr>
+              <a:t>l'âme</a:t>
+            </a:r>
+            <a:r>
+              <a:rPr lang="en-US" sz="2000" i="1" dirty="0">
+                <a:solidFill>
+                  <a:srgbClr val="F5EFE4"/>
+                </a:solidFill>
+                <a:latin typeface="Cambria" panose="02040503050406030204" pitchFamily="18" charset="0"/>
+                <a:ea typeface="Cambria" panose="02040503050406030204" pitchFamily="18" charset="0"/>
+                <a:cs typeface="Cambria" pitchFamily="34" charset="-120"/>
+              </a:rPr>
+              <a:t> </a:t>
+            </a:r>
+            <a:r>
+              <a:rPr lang="en-US" sz="2000" i="1" dirty="0" err="1">
+                <a:solidFill>
+                  <a:srgbClr val="F5EFE4"/>
+                </a:solidFill>
+                <a:latin typeface="Cambria" panose="02040503050406030204" pitchFamily="18" charset="0"/>
+                <a:ea typeface="Cambria" panose="02040503050406030204" pitchFamily="18" charset="0"/>
+                <a:cs typeface="Cambria" pitchFamily="34" charset="-120"/>
+              </a:rPr>
+              <a:t>victorieuse</a:t>
+            </a:r>
+            <a:r>
+              <a:rPr lang="en-US" sz="2000" i="1" dirty="0">
+                <a:solidFill>
+                  <a:srgbClr val="F5EFE4"/>
+                </a:solidFill>
+                <a:latin typeface="Cambria" panose="02040503050406030204" pitchFamily="18" charset="0"/>
+                <a:ea typeface="Cambria" panose="02040503050406030204" pitchFamily="18" charset="0"/>
+                <a:cs typeface="Cambria" pitchFamily="34" charset="-120"/>
+              </a:rPr>
+              <a:t>,</a:t>
+            </a:r>
+            <a:endParaRPr lang="en-US" sz="2000" dirty="0">
+              <a:latin typeface="Cambria" panose="02040503050406030204" pitchFamily="18" charset="0"/>
+              <a:ea typeface="Cambria" panose="02040503050406030204" pitchFamily="18" charset="0"/>
+            </a:endParaRPr>
           </a:p>
           <a:p>
             <a:pPr marL="0" indent="0" algn="l">
@@ -8187,17 +9117,108 @@
               <a:buNone/>
             </a:pPr>
             <a:r>
-              <a:rPr lang="en-US" sz="1350" i="1" dirty="0">
-                <a:solidFill>
-                  <a:srgbClr val="F5EFE4"/>
-                </a:solidFill>
-                <a:latin typeface="Cambria" pitchFamily="34" charset="0"/>
-                <a:ea typeface="Cambria" pitchFamily="34" charset="-122"/>
-                <a:cs typeface="Cambria" pitchFamily="34" charset="-120"/>
-              </a:rPr>
-              <a:t>que donner c'est recevoir,</a:t>
-            </a:r>
-            <a:endParaRPr lang="en-US" sz="1350" dirty="0"/>
+              <a:rPr lang="en-US" sz="2000" i="1" dirty="0">
+                <a:solidFill>
+                  <a:srgbClr val="F5EFE4"/>
+                </a:solidFill>
+                <a:latin typeface="Cambria" panose="02040503050406030204" pitchFamily="18" charset="0"/>
+                <a:ea typeface="Cambria" panose="02040503050406030204" pitchFamily="18" charset="0"/>
+                <a:cs typeface="Cambria" pitchFamily="34" charset="-120"/>
+              </a:rPr>
+              <a:t>- </a:t>
+            </a:r>
+            <a:r>
+              <a:rPr lang="en-US" sz="2000" i="1" dirty="0" err="1">
+                <a:solidFill>
+                  <a:srgbClr val="F5EFE4"/>
+                </a:solidFill>
+                <a:latin typeface="Cambria" panose="02040503050406030204" pitchFamily="18" charset="0"/>
+                <a:ea typeface="Cambria" panose="02040503050406030204" pitchFamily="18" charset="0"/>
+                <a:cs typeface="Cambria" pitchFamily="34" charset="-120"/>
+              </a:rPr>
+              <a:t>que</a:t>
+            </a:r>
+            <a:r>
+              <a:rPr lang="en-US" sz="2000" i="1" dirty="0">
+                <a:solidFill>
+                  <a:srgbClr val="F5EFE4"/>
+                </a:solidFill>
+                <a:latin typeface="Cambria" panose="02040503050406030204" pitchFamily="18" charset="0"/>
+                <a:ea typeface="Cambria" panose="02040503050406030204" pitchFamily="18" charset="0"/>
+                <a:cs typeface="Cambria" pitchFamily="34" charset="-120"/>
+              </a:rPr>
+              <a:t> ne rien </a:t>
+            </a:r>
+            <a:r>
+              <a:rPr lang="en-US" sz="2000" i="1" dirty="0" err="1">
+                <a:solidFill>
+                  <a:srgbClr val="F5EFE4"/>
+                </a:solidFill>
+                <a:latin typeface="Cambria" panose="02040503050406030204" pitchFamily="18" charset="0"/>
+                <a:ea typeface="Cambria" panose="02040503050406030204" pitchFamily="18" charset="0"/>
+                <a:cs typeface="Cambria" pitchFamily="34" charset="-120"/>
+              </a:rPr>
+              <a:t>avoir</a:t>
+            </a:r>
+            <a:r>
+              <a:rPr lang="en-US" sz="2000" i="1" dirty="0">
+                <a:solidFill>
+                  <a:srgbClr val="F5EFE4"/>
+                </a:solidFill>
+                <a:latin typeface="Cambria" panose="02040503050406030204" pitchFamily="18" charset="0"/>
+                <a:ea typeface="Cambria" panose="02040503050406030204" pitchFamily="18" charset="0"/>
+                <a:cs typeface="Cambria" pitchFamily="34" charset="-120"/>
+              </a:rPr>
+              <a:t> </a:t>
+            </a:r>
+            <a:r>
+              <a:rPr lang="en-US" sz="2000" i="1" dirty="0" err="1">
+                <a:solidFill>
+                  <a:srgbClr val="F5EFE4"/>
+                </a:solidFill>
+                <a:latin typeface="Cambria" panose="02040503050406030204" pitchFamily="18" charset="0"/>
+                <a:ea typeface="Cambria" panose="02040503050406030204" pitchFamily="18" charset="0"/>
+                <a:cs typeface="Cambria" pitchFamily="34" charset="-120"/>
+              </a:rPr>
+              <a:t>c'est</a:t>
+            </a:r>
+            <a:r>
+              <a:rPr lang="en-US" sz="2000" i="1" dirty="0">
+                <a:solidFill>
+                  <a:srgbClr val="F5EFE4"/>
+                </a:solidFill>
+                <a:latin typeface="Cambria" panose="02040503050406030204" pitchFamily="18" charset="0"/>
+                <a:ea typeface="Cambria" panose="02040503050406030204" pitchFamily="18" charset="0"/>
+                <a:cs typeface="Cambria" pitchFamily="34" charset="-120"/>
+              </a:rPr>
+              <a:t> tout </a:t>
+            </a:r>
+            <a:r>
+              <a:rPr lang="en-US" sz="2000" i="1" dirty="0" err="1">
+                <a:solidFill>
+                  <a:srgbClr val="F5EFE4"/>
+                </a:solidFill>
+                <a:latin typeface="Cambria" panose="02040503050406030204" pitchFamily="18" charset="0"/>
+                <a:ea typeface="Cambria" panose="02040503050406030204" pitchFamily="18" charset="0"/>
+                <a:cs typeface="Cambria" pitchFamily="34" charset="-120"/>
+              </a:rPr>
+              <a:t>posséder</a:t>
+            </a:r>
+            <a:r>
+              <a:rPr lang="en-US" sz="2000" i="1" dirty="0">
+                <a:solidFill>
+                  <a:srgbClr val="F5EFE4"/>
+                </a:solidFill>
+                <a:latin typeface="Cambria" panose="02040503050406030204" pitchFamily="18" charset="0"/>
+                <a:ea typeface="Cambria" panose="02040503050406030204" pitchFamily="18" charset="0"/>
+                <a:cs typeface="Cambria" pitchFamily="34" charset="-120"/>
+              </a:rPr>
+              <a:t>,</a:t>
+            </a:r>
+            <a:endParaRPr lang="en-US" sz="2000" dirty="0">
+              <a:latin typeface="Cambria" panose="02040503050406030204" pitchFamily="18" charset="0"/>
+              <a:ea typeface="Cambria" panose="02040503050406030204" pitchFamily="18" charset="0"/>
+            </a:endParaRPr>
           </a:p>
           <a:p>
             <a:pPr marL="0" indent="0" algn="l">
@@ -8210,17 +9231,311 @@
               <a:buNone/>
             </a:pPr>
             <a:r>
-              <a:rPr lang="en-US" sz="1350" i="1" dirty="0">
-                <a:solidFill>
-                  <a:srgbClr val="F5EFE4"/>
-                </a:solidFill>
-                <a:latin typeface="Cambria" pitchFamily="34" charset="0"/>
-                <a:ea typeface="Cambria" pitchFamily="34" charset="-122"/>
-                <a:cs typeface="Cambria" pitchFamily="34" charset="-120"/>
-              </a:rPr>
-              <a:t>que la vallée est l'endroit d'une bonne vision.</a:t>
-            </a:r>
-            <a:endParaRPr lang="en-US" sz="1350" dirty="0"/>
+              <a:rPr lang="en-US" sz="2000" i="1" dirty="0">
+                <a:solidFill>
+                  <a:srgbClr val="F5EFE4"/>
+                </a:solidFill>
+                <a:latin typeface="Cambria" panose="02040503050406030204" pitchFamily="18" charset="0"/>
+                <a:ea typeface="Cambria" panose="02040503050406030204" pitchFamily="18" charset="0"/>
+                <a:cs typeface="Cambria" pitchFamily="34" charset="-120"/>
+              </a:rPr>
+              <a:t>- </a:t>
+            </a:r>
+            <a:r>
+              <a:rPr lang="en-US" sz="2000" i="1" dirty="0" err="1">
+                <a:solidFill>
+                  <a:srgbClr val="F5EFE4"/>
+                </a:solidFill>
+                <a:latin typeface="Cambria" panose="02040503050406030204" pitchFamily="18" charset="0"/>
+                <a:ea typeface="Cambria" panose="02040503050406030204" pitchFamily="18" charset="0"/>
+                <a:cs typeface="Cambria" pitchFamily="34" charset="-120"/>
+              </a:rPr>
+              <a:t>que</a:t>
+            </a:r>
+            <a:r>
+              <a:rPr lang="en-US" sz="2000" i="1" dirty="0">
+                <a:solidFill>
+                  <a:srgbClr val="F5EFE4"/>
+                </a:solidFill>
+                <a:latin typeface="Cambria" panose="02040503050406030204" pitchFamily="18" charset="0"/>
+                <a:ea typeface="Cambria" panose="02040503050406030204" pitchFamily="18" charset="0"/>
+                <a:cs typeface="Cambria" pitchFamily="34" charset="-120"/>
+              </a:rPr>
+              <a:t> porter la </a:t>
+            </a:r>
+            <a:r>
+              <a:rPr lang="en-US" sz="2000" i="1" dirty="0" err="1">
+                <a:solidFill>
+                  <a:srgbClr val="F5EFE4"/>
+                </a:solidFill>
+                <a:latin typeface="Cambria" panose="02040503050406030204" pitchFamily="18" charset="0"/>
+                <a:ea typeface="Cambria" panose="02040503050406030204" pitchFamily="18" charset="0"/>
+                <a:cs typeface="Cambria" pitchFamily="34" charset="-120"/>
+              </a:rPr>
+              <a:t>croix</a:t>
+            </a:r>
+            <a:r>
+              <a:rPr lang="en-US" sz="2000" i="1" dirty="0">
+                <a:solidFill>
+                  <a:srgbClr val="F5EFE4"/>
+                </a:solidFill>
+                <a:latin typeface="Cambria" panose="02040503050406030204" pitchFamily="18" charset="0"/>
+                <a:ea typeface="Cambria" panose="02040503050406030204" pitchFamily="18" charset="0"/>
+                <a:cs typeface="Cambria" pitchFamily="34" charset="-120"/>
+              </a:rPr>
+              <a:t> </a:t>
+            </a:r>
+            <a:r>
+              <a:rPr lang="en-US" sz="2000" i="1" dirty="0" err="1">
+                <a:solidFill>
+                  <a:srgbClr val="F5EFE4"/>
+                </a:solidFill>
+                <a:latin typeface="Cambria" panose="02040503050406030204" pitchFamily="18" charset="0"/>
+                <a:ea typeface="Cambria" panose="02040503050406030204" pitchFamily="18" charset="0"/>
+                <a:cs typeface="Cambria" pitchFamily="34" charset="-120"/>
+              </a:rPr>
+              <a:t>c'est</a:t>
+            </a:r>
+            <a:r>
+              <a:rPr lang="en-US" sz="2000" i="1" dirty="0">
+                <a:solidFill>
+                  <a:srgbClr val="F5EFE4"/>
+                </a:solidFill>
+                <a:latin typeface="Cambria" panose="02040503050406030204" pitchFamily="18" charset="0"/>
+                <a:ea typeface="Cambria" panose="02040503050406030204" pitchFamily="18" charset="0"/>
+                <a:cs typeface="Cambria" pitchFamily="34" charset="-120"/>
+              </a:rPr>
+              <a:t> porter de la couronne,</a:t>
+            </a:r>
+            <a:endParaRPr lang="en-US" sz="2000" dirty="0">
+              <a:latin typeface="Cambria" panose="02040503050406030204" pitchFamily="18" charset="0"/>
+              <a:ea typeface="Cambria" panose="02040503050406030204" pitchFamily="18" charset="0"/>
+            </a:endParaRPr>
+          </a:p>
+          <a:p>
+            <a:pPr marL="0" indent="0" algn="l">
+              <a:lnSpc>
+                <a:spcPts val="1809"/>
+              </a:lnSpc>
+              <a:spcAft>
+                <a:spcPts val="500"/>
+              </a:spcAft>
+              <a:buNone/>
+            </a:pPr>
+            <a:r>
+              <a:rPr lang="en-US" sz="2000" i="1" dirty="0">
+                <a:solidFill>
+                  <a:srgbClr val="F5EFE4"/>
+                </a:solidFill>
+                <a:latin typeface="Cambria" panose="02040503050406030204" pitchFamily="18" charset="0"/>
+                <a:ea typeface="Cambria" panose="02040503050406030204" pitchFamily="18" charset="0"/>
+                <a:cs typeface="Cambria" pitchFamily="34" charset="-120"/>
+              </a:rPr>
+              <a:t>- </a:t>
+            </a:r>
+            <a:r>
+              <a:rPr lang="en-US" sz="2000" i="1" dirty="0" err="1">
+                <a:solidFill>
+                  <a:srgbClr val="F5EFE4"/>
+                </a:solidFill>
+                <a:latin typeface="Cambria" panose="02040503050406030204" pitchFamily="18" charset="0"/>
+                <a:ea typeface="Cambria" panose="02040503050406030204" pitchFamily="18" charset="0"/>
+                <a:cs typeface="Cambria" pitchFamily="34" charset="-120"/>
+              </a:rPr>
+              <a:t>que</a:t>
+            </a:r>
+            <a:r>
+              <a:rPr lang="en-US" sz="2000" i="1" dirty="0">
+                <a:solidFill>
+                  <a:srgbClr val="F5EFE4"/>
+                </a:solidFill>
+                <a:latin typeface="Cambria" panose="02040503050406030204" pitchFamily="18" charset="0"/>
+                <a:ea typeface="Cambria" panose="02040503050406030204" pitchFamily="18" charset="0"/>
+                <a:cs typeface="Cambria" pitchFamily="34" charset="-120"/>
+              </a:rPr>
+              <a:t> donner </a:t>
+            </a:r>
+            <a:r>
+              <a:rPr lang="en-US" sz="2000" i="1" dirty="0" err="1">
+                <a:solidFill>
+                  <a:srgbClr val="F5EFE4"/>
+                </a:solidFill>
+                <a:latin typeface="Cambria" panose="02040503050406030204" pitchFamily="18" charset="0"/>
+                <a:ea typeface="Cambria" panose="02040503050406030204" pitchFamily="18" charset="0"/>
+                <a:cs typeface="Cambria" pitchFamily="34" charset="-120"/>
+              </a:rPr>
+              <a:t>c'est</a:t>
+            </a:r>
+            <a:r>
+              <a:rPr lang="en-US" sz="2000" i="1" dirty="0">
+                <a:solidFill>
+                  <a:srgbClr val="F5EFE4"/>
+                </a:solidFill>
+                <a:latin typeface="Cambria" panose="02040503050406030204" pitchFamily="18" charset="0"/>
+                <a:ea typeface="Cambria" panose="02040503050406030204" pitchFamily="18" charset="0"/>
+                <a:cs typeface="Cambria" pitchFamily="34" charset="-120"/>
+              </a:rPr>
+              <a:t> </a:t>
+            </a:r>
+            <a:r>
+              <a:rPr lang="en-US" sz="2000" i="1" dirty="0" err="1">
+                <a:solidFill>
+                  <a:srgbClr val="F5EFE4"/>
+                </a:solidFill>
+                <a:latin typeface="Cambria" panose="02040503050406030204" pitchFamily="18" charset="0"/>
+                <a:ea typeface="Cambria" panose="02040503050406030204" pitchFamily="18" charset="0"/>
+                <a:cs typeface="Cambria" pitchFamily="34" charset="-120"/>
+              </a:rPr>
+              <a:t>recevoir</a:t>
+            </a:r>
+            <a:r>
+              <a:rPr lang="en-US" sz="2000" i="1" dirty="0">
+                <a:solidFill>
+                  <a:srgbClr val="F5EFE4"/>
+                </a:solidFill>
+                <a:latin typeface="Cambria" panose="02040503050406030204" pitchFamily="18" charset="0"/>
+                <a:ea typeface="Cambria" panose="02040503050406030204" pitchFamily="18" charset="0"/>
+                <a:cs typeface="Cambria" pitchFamily="34" charset="-120"/>
+              </a:rPr>
+              <a:t>,</a:t>
+            </a:r>
+            <a:endParaRPr lang="en-US" sz="2000" dirty="0">
+              <a:latin typeface="Cambria" panose="02040503050406030204" pitchFamily="18" charset="0"/>
+              <a:ea typeface="Cambria" panose="02040503050406030204" pitchFamily="18" charset="0"/>
+            </a:endParaRPr>
+          </a:p>
+          <a:p>
+            <a:pPr marL="0" indent="0" algn="l">
+              <a:lnSpc>
+                <a:spcPts val="1809"/>
+              </a:lnSpc>
+              <a:spcAft>
+                <a:spcPts val="500"/>
+              </a:spcAft>
+              <a:buNone/>
+            </a:pPr>
+            <a:endParaRPr lang="en-US" sz="2000" i="1" dirty="0">
+              <a:solidFill>
+                <a:srgbClr val="F5EFE4"/>
+              </a:solidFill>
+              <a:latin typeface="Cambria" panose="02040503050406030204" pitchFamily="18" charset="0"/>
+              <a:ea typeface="Cambria" panose="02040503050406030204" pitchFamily="18" charset="0"/>
+              <a:cs typeface="Cambria" pitchFamily="34" charset="-120"/>
+            </a:endParaRPr>
+          </a:p>
+          <a:p>
+            <a:pPr marL="0" indent="0" algn="l">
+              <a:lnSpc>
+                <a:spcPts val="1809"/>
+              </a:lnSpc>
+              <a:spcAft>
+                <a:spcPts val="500"/>
+              </a:spcAft>
+              <a:buNone/>
+            </a:pPr>
+            <a:r>
+              <a:rPr lang="en-US" sz="2000" i="1" dirty="0">
+                <a:solidFill>
+                  <a:srgbClr val="F5EFE4"/>
+                </a:solidFill>
+                <a:latin typeface="Cambria" panose="02040503050406030204" pitchFamily="18" charset="0"/>
+                <a:ea typeface="Cambria" panose="02040503050406030204" pitchFamily="18" charset="0"/>
+                <a:cs typeface="Cambria" pitchFamily="34" charset="-120"/>
+              </a:rPr>
+              <a:t>- </a:t>
+            </a:r>
+            <a:r>
+              <a:rPr lang="en-US" sz="2000" i="1" dirty="0" err="1">
+                <a:solidFill>
+                  <a:srgbClr val="F5EFE4"/>
+                </a:solidFill>
+                <a:latin typeface="Cambria" panose="02040503050406030204" pitchFamily="18" charset="0"/>
+                <a:ea typeface="Cambria" panose="02040503050406030204" pitchFamily="18" charset="0"/>
+                <a:cs typeface="Cambria" pitchFamily="34" charset="-120"/>
+              </a:rPr>
+              <a:t>que</a:t>
+            </a:r>
+            <a:r>
+              <a:rPr lang="en-US" sz="2000" i="1" dirty="0">
+                <a:solidFill>
+                  <a:srgbClr val="F5EFE4"/>
+                </a:solidFill>
+                <a:latin typeface="Cambria" panose="02040503050406030204" pitchFamily="18" charset="0"/>
+                <a:ea typeface="Cambria" panose="02040503050406030204" pitchFamily="18" charset="0"/>
+                <a:cs typeface="Cambria" pitchFamily="34" charset="-120"/>
+              </a:rPr>
+              <a:t> la </a:t>
+            </a:r>
+            <a:r>
+              <a:rPr lang="en-US" sz="2000" i="1" dirty="0" err="1">
+                <a:solidFill>
+                  <a:srgbClr val="F5EFE4"/>
+                </a:solidFill>
+                <a:latin typeface="Cambria" panose="02040503050406030204" pitchFamily="18" charset="0"/>
+                <a:ea typeface="Cambria" panose="02040503050406030204" pitchFamily="18" charset="0"/>
+                <a:cs typeface="Cambria" pitchFamily="34" charset="-120"/>
+              </a:rPr>
+              <a:t>vallée</a:t>
+            </a:r>
+            <a:r>
+              <a:rPr lang="en-US" sz="2000" i="1" dirty="0">
+                <a:solidFill>
+                  <a:srgbClr val="F5EFE4"/>
+                </a:solidFill>
+                <a:latin typeface="Cambria" panose="02040503050406030204" pitchFamily="18" charset="0"/>
+                <a:ea typeface="Cambria" panose="02040503050406030204" pitchFamily="18" charset="0"/>
+                <a:cs typeface="Cambria" pitchFamily="34" charset="-120"/>
+              </a:rPr>
+              <a:t> est </a:t>
+            </a:r>
+            <a:r>
+              <a:rPr lang="en-US" sz="2000" i="1" dirty="0" err="1">
+                <a:solidFill>
+                  <a:srgbClr val="F5EFE4"/>
+                </a:solidFill>
+                <a:latin typeface="Cambria" panose="02040503050406030204" pitchFamily="18" charset="0"/>
+                <a:ea typeface="Cambria" panose="02040503050406030204" pitchFamily="18" charset="0"/>
+                <a:cs typeface="Cambria" pitchFamily="34" charset="-120"/>
+              </a:rPr>
+              <a:t>l'endroit</a:t>
+            </a:r>
+            <a:r>
+              <a:rPr lang="en-US" sz="2000" i="1" dirty="0">
+                <a:solidFill>
+                  <a:srgbClr val="F5EFE4"/>
+                </a:solidFill>
+                <a:latin typeface="Cambria" panose="02040503050406030204" pitchFamily="18" charset="0"/>
+                <a:ea typeface="Cambria" panose="02040503050406030204" pitchFamily="18" charset="0"/>
+                <a:cs typeface="Cambria" pitchFamily="34" charset="-120"/>
+              </a:rPr>
+              <a:t> </a:t>
+            </a:r>
+            <a:r>
+              <a:rPr lang="en-US" sz="2000" i="1" dirty="0" err="1">
+                <a:solidFill>
+                  <a:srgbClr val="F5EFE4"/>
+                </a:solidFill>
+                <a:latin typeface="Cambria" panose="02040503050406030204" pitchFamily="18" charset="0"/>
+                <a:ea typeface="Cambria" panose="02040503050406030204" pitchFamily="18" charset="0"/>
+                <a:cs typeface="Cambria" pitchFamily="34" charset="-120"/>
+              </a:rPr>
+              <a:t>d'une</a:t>
+            </a:r>
+            <a:r>
+              <a:rPr lang="en-US" sz="2000" i="1" dirty="0">
+                <a:solidFill>
+                  <a:srgbClr val="F5EFE4"/>
+                </a:solidFill>
+                <a:latin typeface="Cambria" panose="02040503050406030204" pitchFamily="18" charset="0"/>
+                <a:ea typeface="Cambria" panose="02040503050406030204" pitchFamily="18" charset="0"/>
+                <a:cs typeface="Cambria" pitchFamily="34" charset="-120"/>
+              </a:rPr>
+              <a:t> bonne vision.</a:t>
+            </a:r>
+            <a:endParaRPr lang="en-US" sz="2000" dirty="0">
+              <a:latin typeface="Cambria" panose="02040503050406030204" pitchFamily="18" charset="0"/>
+              <a:ea typeface="Cambria" panose="02040503050406030204" pitchFamily="18" charset="0"/>
+            </a:endParaRPr>
           </a:p>
         </p:txBody>
       </p:sp>
@@ -8331,29 +9646,14 @@
               </a:lnSpc>
               <a:buNone/>
             </a:pPr>
-            <a:r>
-              <a:rPr lang="en-US" sz="1400" b="1" dirty="0">
-                <a:solidFill>
-                  <a:srgbClr val="E8821E"/>
-                </a:solidFill>
-                <a:latin typeface="Cambria" pitchFamily="34" charset="0"/>
-                <a:ea typeface="Cambria" pitchFamily="34" charset="-122"/>
-                <a:cs typeface="Cambria" pitchFamily="34" charset="-120"/>
-              </a:rPr>
-              <a:t>Sens — </a:t>
-            </a:r>
-            <a:r>
-              <a:rPr lang="en-US" sz="1400" dirty="0">
-                <a:solidFill>
-                  <a:srgbClr val="F5EFE4"/>
-                </a:solidFill>
-                <a:latin typeface="Cambria" pitchFamily="34" charset="0"/>
-                <a:ea typeface="Cambria" pitchFamily="34" charset="-122"/>
-                <a:cs typeface="Cambria" pitchFamily="34" charset="-120"/>
-              </a:rPr>
-              <a:t>la litanie résume l'inversion évangélique : le chemin de l'abaissement est celui de l'élévation (Mt 23.12 ; Mt 16.24-25).</a:t>
-            </a:r>
-            <a:endParaRPr lang="en-US" sz="1400" dirty="0"/>
+            <a:endParaRPr lang="en-US" sz="1400" b="1" dirty="0">
+              <a:solidFill>
+                <a:srgbClr val="E8821E"/>
+              </a:solidFill>
+              <a:latin typeface="Cambria" pitchFamily="34" charset="0"/>
+              <a:ea typeface="Cambria" pitchFamily="34" charset="-122"/>
+              <a:cs typeface="Cambria" pitchFamily="34" charset="-120"/>
+            </a:endParaRPr>
           </a:p>
           <a:p>
             <a:pPr marL="0" indent="0" algn="ctr">
@@ -8362,29 +9662,14 @@
               </a:lnSpc>
               <a:buNone/>
             </a:pPr>
-            <a:r>
-              <a:rPr lang="en-US" sz="1400" b="1" dirty="0">
-                <a:solidFill>
-                  <a:srgbClr val="E8821E"/>
-                </a:solidFill>
-                <a:latin typeface="Cambria" pitchFamily="34" charset="0"/>
-                <a:ea typeface="Cambria" pitchFamily="34" charset="-122"/>
-                <a:cs typeface="Cambria" pitchFamily="34" charset="-120"/>
-              </a:rPr>
-              <a:t>Le modèle — </a:t>
-            </a:r>
-            <a:r>
-              <a:rPr lang="en-US" sz="1400" dirty="0">
-                <a:solidFill>
-                  <a:srgbClr val="F5EFE4"/>
-                </a:solidFill>
-                <a:latin typeface="Cambria" pitchFamily="34" charset="0"/>
-                <a:ea typeface="Cambria" pitchFamily="34" charset="-122"/>
-                <a:cs typeface="Cambria" pitchFamily="34" charset="-120"/>
-              </a:rPr>
-              <a:t>la kénose du Christ : il s'est abaissé, c'est pourquoi Dieu l'a souverainement élevé (Ph 2.5-11).</a:t>
-            </a:r>
-            <a:endParaRPr lang="en-US" sz="1400" dirty="0"/>
+            <a:endParaRPr lang="en-US" sz="1400" b="1" dirty="0">
+              <a:solidFill>
+                <a:srgbClr val="E8821E"/>
+              </a:solidFill>
+              <a:latin typeface="Cambria" pitchFamily="34" charset="0"/>
+              <a:ea typeface="Cambria" pitchFamily="34" charset="-122"/>
+              <a:cs typeface="Cambria" pitchFamily="34" charset="-120"/>
+            </a:endParaRPr>
           </a:p>
           <a:p>
             <a:pPr marL="0" indent="0" algn="ctr">
@@ -8402,7 +9687,7 @@
                 <a:ea typeface="Cambria" pitchFamily="34" charset="-122"/>
                 <a:cs typeface="Cambria" pitchFamily="34" charset="-120"/>
               </a:rPr>
-              <a:t>Réfutation — </a:t>
+              <a:t>Sens — </a:t>
             </a:r>
             <a:r>
               <a:rPr lang="en-US" sz="1400" dirty="0">
@@ -8413,7 +9698,235 @@
                 <a:ea typeface="Cambria" pitchFamily="34" charset="-122"/>
                 <a:cs typeface="Cambria" pitchFamily="34" charset="-120"/>
               </a:rPr>
-              <a:t>contre le triomphalisme et l'évangile de la prospérité, qui suppriment la croix. Porter la croix précède la couronne (2 Ti 2.12).</a:t>
+              <a:t>la litanie résume l'inversion évangélique : le chemin de l'abaissement est celui de </a:t>
+            </a:r>
+            <a:r>
+              <a:rPr lang="en-US" sz="1400" dirty="0" err="1">
+                <a:solidFill>
+                  <a:srgbClr val="F5EFE4"/>
+                </a:solidFill>
+                <a:latin typeface="Cambria" pitchFamily="34" charset="0"/>
+                <a:ea typeface="Cambria" pitchFamily="34" charset="-122"/>
+                <a:cs typeface="Cambria" pitchFamily="34" charset="-120"/>
+              </a:rPr>
+              <a:t>l'élévation</a:t>
+            </a:r>
+            <a:r>
+              <a:rPr lang="en-US" sz="1400" dirty="0">
+                <a:solidFill>
+                  <a:srgbClr val="F5EFE4"/>
+                </a:solidFill>
+                <a:latin typeface="Cambria" pitchFamily="34" charset="0"/>
+                <a:ea typeface="Cambria" pitchFamily="34" charset="-122"/>
+                <a:cs typeface="Cambria" pitchFamily="34" charset="-120"/>
+              </a:rPr>
+              <a:t> </a:t>
+            </a:r>
+          </a:p>
+          <a:p>
+            <a:pPr marL="0" indent="0" algn="ctr">
+              <a:lnSpc>
+                <a:spcPts val="1848"/>
+              </a:lnSpc>
+              <a:buNone/>
+            </a:pPr>
+            <a:r>
+              <a:rPr lang="en-US" sz="1400" dirty="0">
+                <a:solidFill>
+                  <a:srgbClr val="F5EFE4"/>
+                </a:solidFill>
+                <a:latin typeface="Cambria" pitchFamily="34" charset="0"/>
+                <a:ea typeface="Cambria" pitchFamily="34" charset="-122"/>
+                <a:cs typeface="Cambria" pitchFamily="34" charset="-120"/>
+              </a:rPr>
+              <a:t>(Mt 23.12 ; Mt 16.24-25)</a:t>
+            </a:r>
+            <a:endParaRPr lang="en-US" sz="1400" dirty="0"/>
+          </a:p>
+          <a:p>
+            <a:pPr marL="0" indent="0" algn="ctr">
+              <a:lnSpc>
+                <a:spcPts val="1848"/>
+              </a:lnSpc>
+              <a:buNone/>
+            </a:pPr>
+            <a:endParaRPr lang="en-US" sz="1400" b="1" dirty="0">
+              <a:solidFill>
+                <a:srgbClr val="E8821E"/>
+              </a:solidFill>
+              <a:latin typeface="Cambria" pitchFamily="34" charset="0"/>
+              <a:ea typeface="Cambria" pitchFamily="34" charset="-122"/>
+              <a:cs typeface="Cambria" pitchFamily="34" charset="-120"/>
+            </a:endParaRPr>
+          </a:p>
+          <a:p>
+            <a:pPr marL="0" indent="0" algn="ctr">
+              <a:lnSpc>
+                <a:spcPts val="1848"/>
+              </a:lnSpc>
+              <a:buNone/>
+            </a:pPr>
+            <a:r>
+              <a:rPr lang="en-US" sz="1400" b="1" dirty="0">
+                <a:solidFill>
+                  <a:srgbClr val="E8821E"/>
+                </a:solidFill>
+                <a:latin typeface="Cambria" pitchFamily="34" charset="0"/>
+                <a:ea typeface="Cambria" pitchFamily="34" charset="-122"/>
+                <a:cs typeface="Cambria" pitchFamily="34" charset="-120"/>
+              </a:rPr>
+              <a:t>Le modèle — </a:t>
+            </a:r>
+            <a:r>
+              <a:rPr lang="en-US" sz="1400" dirty="0">
+                <a:solidFill>
+                  <a:srgbClr val="F5EFE4"/>
+                </a:solidFill>
+                <a:latin typeface="Cambria" pitchFamily="34" charset="0"/>
+                <a:ea typeface="Cambria" pitchFamily="34" charset="-122"/>
+                <a:cs typeface="Cambria" pitchFamily="34" charset="-120"/>
+              </a:rPr>
+              <a:t>la kénose du Christ : il s'est abaissé, c'est pourquoi Dieu l'a </a:t>
+            </a:r>
+            <a:r>
+              <a:rPr lang="en-US" sz="1400" dirty="0" err="1">
+                <a:solidFill>
+                  <a:srgbClr val="F5EFE4"/>
+                </a:solidFill>
+                <a:latin typeface="Cambria" pitchFamily="34" charset="0"/>
+                <a:ea typeface="Cambria" pitchFamily="34" charset="-122"/>
+                <a:cs typeface="Cambria" pitchFamily="34" charset="-120"/>
+              </a:rPr>
+              <a:t>souverainement</a:t>
+            </a:r>
+            <a:r>
+              <a:rPr lang="en-US" sz="1400" dirty="0">
+                <a:solidFill>
+                  <a:srgbClr val="F5EFE4"/>
+                </a:solidFill>
+                <a:latin typeface="Cambria" pitchFamily="34" charset="0"/>
+                <a:ea typeface="Cambria" pitchFamily="34" charset="-122"/>
+                <a:cs typeface="Cambria" pitchFamily="34" charset="-120"/>
+              </a:rPr>
+              <a:t> </a:t>
+            </a:r>
+            <a:r>
+              <a:rPr lang="en-US" sz="1400" dirty="0" err="1">
+                <a:solidFill>
+                  <a:srgbClr val="F5EFE4"/>
+                </a:solidFill>
+                <a:latin typeface="Cambria" pitchFamily="34" charset="0"/>
+                <a:ea typeface="Cambria" pitchFamily="34" charset="-122"/>
+                <a:cs typeface="Cambria" pitchFamily="34" charset="-120"/>
+              </a:rPr>
+              <a:t>élevé</a:t>
+            </a:r>
+            <a:r>
+              <a:rPr lang="en-US" sz="1400" dirty="0">
+                <a:solidFill>
+                  <a:srgbClr val="F5EFE4"/>
+                </a:solidFill>
+                <a:latin typeface="Cambria" pitchFamily="34" charset="0"/>
+                <a:ea typeface="Cambria" pitchFamily="34" charset="-122"/>
+                <a:cs typeface="Cambria" pitchFamily="34" charset="-120"/>
+              </a:rPr>
+              <a:t>.</a:t>
+            </a:r>
+          </a:p>
+          <a:p>
+            <a:pPr marL="0" indent="0" algn="ctr">
+              <a:lnSpc>
+                <a:spcPts val="1848"/>
+              </a:lnSpc>
+              <a:buNone/>
+            </a:pPr>
+            <a:r>
+              <a:rPr lang="en-US" sz="1400" dirty="0">
+                <a:solidFill>
+                  <a:srgbClr val="F5EFE4"/>
+                </a:solidFill>
+                <a:latin typeface="Cambria" pitchFamily="34" charset="0"/>
+                <a:ea typeface="Cambria" pitchFamily="34" charset="-122"/>
+                <a:cs typeface="Cambria" pitchFamily="34" charset="-120"/>
+              </a:rPr>
+              <a:t>(Ph 2.5-11)</a:t>
+            </a:r>
+            <a:endParaRPr lang="en-US" sz="1400" dirty="0"/>
+          </a:p>
+          <a:p>
+            <a:pPr marL="0" indent="0" algn="ctr">
+              <a:lnSpc>
+                <a:spcPts val="1848"/>
+              </a:lnSpc>
+              <a:buNone/>
+            </a:pPr>
+            <a:endParaRPr lang="en-US" sz="1400" b="1" dirty="0">
+              <a:solidFill>
+                <a:srgbClr val="E8821E"/>
+              </a:solidFill>
+              <a:latin typeface="Cambria" pitchFamily="34" charset="0"/>
+              <a:ea typeface="Cambria" pitchFamily="34" charset="-122"/>
+              <a:cs typeface="Cambria" pitchFamily="34" charset="-120"/>
+            </a:endParaRPr>
+          </a:p>
+          <a:p>
+            <a:pPr marL="0" indent="0" algn="ctr">
+              <a:lnSpc>
+                <a:spcPts val="1848"/>
+              </a:lnSpc>
+              <a:buNone/>
+            </a:pPr>
+            <a:r>
+              <a:rPr lang="en-US" sz="1400" b="1" dirty="0" err="1">
+                <a:solidFill>
+                  <a:srgbClr val="E8821E"/>
+                </a:solidFill>
+                <a:latin typeface="Cambria" pitchFamily="34" charset="0"/>
+                <a:ea typeface="Cambria" pitchFamily="34" charset="-122"/>
+                <a:cs typeface="Cambria" pitchFamily="34" charset="-120"/>
+              </a:rPr>
+              <a:t>Réfutation</a:t>
+            </a:r>
+            <a:r>
+              <a:rPr lang="en-US" sz="1400" b="1" dirty="0">
+                <a:solidFill>
+                  <a:srgbClr val="E8821E"/>
+                </a:solidFill>
+                <a:latin typeface="Cambria" pitchFamily="34" charset="0"/>
+                <a:ea typeface="Cambria" pitchFamily="34" charset="-122"/>
+                <a:cs typeface="Cambria" pitchFamily="34" charset="-120"/>
+              </a:rPr>
+              <a:t> — </a:t>
+            </a:r>
+            <a:r>
+              <a:rPr lang="en-US" sz="1400" dirty="0">
+                <a:solidFill>
+                  <a:srgbClr val="F5EFE4"/>
+                </a:solidFill>
+                <a:latin typeface="Cambria" pitchFamily="34" charset="0"/>
+                <a:ea typeface="Cambria" pitchFamily="34" charset="-122"/>
+                <a:cs typeface="Cambria" pitchFamily="34" charset="-120"/>
+              </a:rPr>
+              <a:t>contre le triomphalisme et l'évangile de la prospérité, qui suppriment la croix. Porter la croix précède la couronne </a:t>
+            </a:r>
+          </a:p>
+          <a:p>
+            <a:pPr marL="0" indent="0" algn="ctr">
+              <a:lnSpc>
+                <a:spcPts val="1848"/>
+              </a:lnSpc>
+              <a:buNone/>
+            </a:pPr>
+            <a:r>
+              <a:rPr lang="en-US" sz="1400" dirty="0">
+                <a:solidFill>
+                  <a:srgbClr val="F5EFE4"/>
+                </a:solidFill>
+                <a:latin typeface="Cambria" pitchFamily="34" charset="0"/>
+                <a:ea typeface="Cambria" pitchFamily="34" charset="-122"/>
+                <a:cs typeface="Cambria" pitchFamily="34" charset="-120"/>
+              </a:rPr>
+              <a:t>(2 Ti 2.12).</a:t>
             </a:r>
             <a:endParaRPr lang="en-US" sz="1400" dirty="0"/>
           </a:p>
